--- a/M2/Skill/6-Giflow/6 Gitflow.pptx
+++ b/M2/Skill/6-Giflow/6 Gitflow.pptx
@@ -11,8 +11,8 @@
     <p:sldId id="259" r:id="rId5"/>
     <p:sldId id="260" r:id="rId6"/>
     <p:sldId id="261" r:id="rId7"/>
-    <p:sldId id="262" r:id="rId8"/>
-    <p:sldId id="263" r:id="rId9"/>
+    <p:sldId id="263" r:id="rId8"/>
+    <p:sldId id="268" r:id="rId9"/>
     <p:sldId id="266" r:id="rId10"/>
     <p:sldId id="267" r:id="rId11"/>
   </p:sldIdLst>
@@ -121,6 +121,379 @@
 </p:presentation>
 </file>
 
+<file path=ppt/changesInfos/changesInfo1.xml><?xml version="1.0" encoding="utf-8"?>
+<pc:chgInfo xmlns:a="http://schemas.openxmlformats.org/drawingml/2006/main" xmlns:r="http://schemas.openxmlformats.org/officeDocument/2006/relationships" xmlns:ac="http://schemas.microsoft.com/office/drawing/2013/main/command" xmlns:pc="http://schemas.microsoft.com/office/powerpoint/2013/main/command">
+  <pc:docChgLst>
+    <pc:chgData name="Jelle Sjollema" userId="697d5fec-fa16-44ca-847a-2a2a8b0e1e72" providerId="ADAL" clId="{81C8176F-EDA9-42E8-ADD1-2B7E1473E46F}"/>
+    <pc:docChg chg="custSel addSld delSld modSld">
+      <pc:chgData name="Jelle Sjollema" userId="697d5fec-fa16-44ca-847a-2a2a8b0e1e72" providerId="ADAL" clId="{81C8176F-EDA9-42E8-ADD1-2B7E1473E46F}" dt="2026-01-15T15:36:24.897" v="292" actId="20577"/>
+      <pc:docMkLst>
+        <pc:docMk/>
+      </pc:docMkLst>
+      <pc:sldChg chg="addSp delSp modSp new mod">
+        <pc:chgData name="Jelle Sjollema" userId="697d5fec-fa16-44ca-847a-2a2a8b0e1e72" providerId="ADAL" clId="{81C8176F-EDA9-42E8-ADD1-2B7E1473E46F}" dt="2026-01-15T15:36:24.897" v="292" actId="20577"/>
+        <pc:sldMkLst>
+          <pc:docMk/>
+          <pc:sldMk cId="1432869680" sldId="268"/>
+        </pc:sldMkLst>
+        <pc:spChg chg="mod">
+          <ac:chgData name="Jelle Sjollema" userId="697d5fec-fa16-44ca-847a-2a2a8b0e1e72" providerId="ADAL" clId="{81C8176F-EDA9-42E8-ADD1-2B7E1473E46F}" dt="2026-01-15T15:36:24.897" v="292" actId="20577"/>
+          <ac:spMkLst>
+            <pc:docMk/>
+            <pc:sldMk cId="1432869680" sldId="268"/>
+            <ac:spMk id="2" creationId="{999DD0BF-2B26-A975-2D35-1B61281518E4}"/>
+          </ac:spMkLst>
+        </pc:spChg>
+        <pc:spChg chg="add mod">
+          <ac:chgData name="Jelle Sjollema" userId="697d5fec-fa16-44ca-847a-2a2a8b0e1e72" providerId="ADAL" clId="{81C8176F-EDA9-42E8-ADD1-2B7E1473E46F}" dt="2026-01-15T11:19:27.408" v="220" actId="1076"/>
+          <ac:spMkLst>
+            <pc:docMk/>
+            <pc:sldMk cId="1432869680" sldId="268"/>
+            <ac:spMk id="6" creationId="{34EA9D95-8100-FADA-FEFB-75C7B5C5D743}"/>
+          </ac:spMkLst>
+        </pc:spChg>
+        <pc:spChg chg="add mod ord">
+          <ac:chgData name="Jelle Sjollema" userId="697d5fec-fa16-44ca-847a-2a2a8b0e1e72" providerId="ADAL" clId="{81C8176F-EDA9-42E8-ADD1-2B7E1473E46F}" dt="2026-01-15T11:35:03.056" v="283" actId="166"/>
+          <ac:spMkLst>
+            <pc:docMk/>
+            <pc:sldMk cId="1432869680" sldId="268"/>
+            <ac:spMk id="7" creationId="{54045392-D1AB-6FF8-1AE6-F9E660C7AB73}"/>
+          </ac:spMkLst>
+        </pc:spChg>
+        <pc:spChg chg="add mod ord">
+          <ac:chgData name="Jelle Sjollema" userId="697d5fec-fa16-44ca-847a-2a2a8b0e1e72" providerId="ADAL" clId="{81C8176F-EDA9-42E8-ADD1-2B7E1473E46F}" dt="2026-01-15T11:35:07.436" v="284" actId="166"/>
+          <ac:spMkLst>
+            <pc:docMk/>
+            <pc:sldMk cId="1432869680" sldId="268"/>
+            <ac:spMk id="8" creationId="{25F1B197-D1A1-A2E5-D0EE-A8E393245DD9}"/>
+          </ac:spMkLst>
+        </pc:spChg>
+        <pc:spChg chg="add mod">
+          <ac:chgData name="Jelle Sjollema" userId="697d5fec-fa16-44ca-847a-2a2a8b0e1e72" providerId="ADAL" clId="{81C8176F-EDA9-42E8-ADD1-2B7E1473E46F}" dt="2026-01-15T11:19:22.674" v="219" actId="1076"/>
+          <ac:spMkLst>
+            <pc:docMk/>
+            <pc:sldMk cId="1432869680" sldId="268"/>
+            <ac:spMk id="14" creationId="{40D00685-6489-A3AC-FC86-11AF79329711}"/>
+          </ac:spMkLst>
+        </pc:spChg>
+        <pc:spChg chg="add mod">
+          <ac:chgData name="Jelle Sjollema" userId="697d5fec-fa16-44ca-847a-2a2a8b0e1e72" providerId="ADAL" clId="{81C8176F-EDA9-42E8-ADD1-2B7E1473E46F}" dt="2026-01-15T11:10:51.175" v="53" actId="1076"/>
+          <ac:spMkLst>
+            <pc:docMk/>
+            <pc:sldMk cId="1432869680" sldId="268"/>
+            <ac:spMk id="15" creationId="{EFBFC290-F8F2-095F-185D-D7EB3A55E31B}"/>
+          </ac:spMkLst>
+        </pc:spChg>
+        <pc:spChg chg="add mod">
+          <ac:chgData name="Jelle Sjollema" userId="697d5fec-fa16-44ca-847a-2a2a8b0e1e72" providerId="ADAL" clId="{81C8176F-EDA9-42E8-ADD1-2B7E1473E46F}" dt="2026-01-15T11:17:07.071" v="186" actId="1038"/>
+          <ac:spMkLst>
+            <pc:docMk/>
+            <pc:sldMk cId="1432869680" sldId="268"/>
+            <ac:spMk id="19" creationId="{1D99D054-4CC2-196B-3E72-0E516F913F34}"/>
+          </ac:spMkLst>
+        </pc:spChg>
+        <pc:spChg chg="add mod">
+          <ac:chgData name="Jelle Sjollema" userId="697d5fec-fa16-44ca-847a-2a2a8b0e1e72" providerId="ADAL" clId="{81C8176F-EDA9-42E8-ADD1-2B7E1473E46F}" dt="2026-01-15T11:12:23.864" v="73" actId="1076"/>
+          <ac:spMkLst>
+            <pc:docMk/>
+            <pc:sldMk cId="1432869680" sldId="268"/>
+            <ac:spMk id="36" creationId="{E52793BE-12CA-09CD-3029-14746D6FE477}"/>
+          </ac:spMkLst>
+        </pc:spChg>
+        <pc:spChg chg="add mod">
+          <ac:chgData name="Jelle Sjollema" userId="697d5fec-fa16-44ca-847a-2a2a8b0e1e72" providerId="ADAL" clId="{81C8176F-EDA9-42E8-ADD1-2B7E1473E46F}" dt="2026-01-15T11:17:07.071" v="186" actId="1038"/>
+          <ac:spMkLst>
+            <pc:docMk/>
+            <pc:sldMk cId="1432869680" sldId="268"/>
+            <ac:spMk id="40" creationId="{F5F302D7-2D21-E14A-E01E-1D2171B2E59F}"/>
+          </ac:spMkLst>
+        </pc:spChg>
+        <pc:spChg chg="add mod ord">
+          <ac:chgData name="Jelle Sjollema" userId="697d5fec-fa16-44ca-847a-2a2a8b0e1e72" providerId="ADAL" clId="{81C8176F-EDA9-42E8-ADD1-2B7E1473E46F}" dt="2026-01-15T11:34:44.863" v="280" actId="166"/>
+          <ac:spMkLst>
+            <pc:docMk/>
+            <pc:sldMk cId="1432869680" sldId="268"/>
+            <ac:spMk id="41" creationId="{4B36DBA4-1BBF-017F-514A-B85DCA0F9915}"/>
+          </ac:spMkLst>
+        </pc:spChg>
+        <pc:spChg chg="add mod">
+          <ac:chgData name="Jelle Sjollema" userId="697d5fec-fa16-44ca-847a-2a2a8b0e1e72" providerId="ADAL" clId="{81C8176F-EDA9-42E8-ADD1-2B7E1473E46F}" dt="2026-01-15T11:13:07.324" v="84" actId="1076"/>
+          <ac:spMkLst>
+            <pc:docMk/>
+            <pc:sldMk cId="1432869680" sldId="268"/>
+            <ac:spMk id="42" creationId="{8BA4C85E-1608-B56D-8D0E-B2DF9CB686B6}"/>
+          </ac:spMkLst>
+        </pc:spChg>
+        <pc:spChg chg="add mod">
+          <ac:chgData name="Jelle Sjollema" userId="697d5fec-fa16-44ca-847a-2a2a8b0e1e72" providerId="ADAL" clId="{81C8176F-EDA9-42E8-ADD1-2B7E1473E46F}" dt="2026-01-15T11:17:07.071" v="186" actId="1038"/>
+          <ac:spMkLst>
+            <pc:docMk/>
+            <pc:sldMk cId="1432869680" sldId="268"/>
+            <ac:spMk id="55" creationId="{1F9450CA-F0B0-A271-AD59-F325D456D025}"/>
+          </ac:spMkLst>
+        </pc:spChg>
+        <pc:spChg chg="add mod">
+          <ac:chgData name="Jelle Sjollema" userId="697d5fec-fa16-44ca-847a-2a2a8b0e1e72" providerId="ADAL" clId="{81C8176F-EDA9-42E8-ADD1-2B7E1473E46F}" dt="2026-01-15T11:14:07.403" v="103" actId="1076"/>
+          <ac:spMkLst>
+            <pc:docMk/>
+            <pc:sldMk cId="1432869680" sldId="268"/>
+            <ac:spMk id="56" creationId="{46CD3781-3108-CB8A-275B-B5E879220A79}"/>
+          </ac:spMkLst>
+        </pc:spChg>
+        <pc:spChg chg="add mod">
+          <ac:chgData name="Jelle Sjollema" userId="697d5fec-fa16-44ca-847a-2a2a8b0e1e72" providerId="ADAL" clId="{81C8176F-EDA9-42E8-ADD1-2B7E1473E46F}" dt="2026-01-15T11:14:11.549" v="105" actId="1076"/>
+          <ac:spMkLst>
+            <pc:docMk/>
+            <pc:sldMk cId="1432869680" sldId="268"/>
+            <ac:spMk id="57" creationId="{E5AF3187-DE14-8212-7C6A-EDD99AF70AC3}"/>
+          </ac:spMkLst>
+        </pc:spChg>
+        <pc:spChg chg="add mod ord">
+          <ac:chgData name="Jelle Sjollema" userId="697d5fec-fa16-44ca-847a-2a2a8b0e1e72" providerId="ADAL" clId="{81C8176F-EDA9-42E8-ADD1-2B7E1473E46F}" dt="2026-01-15T11:19:06.635" v="217" actId="166"/>
+          <ac:spMkLst>
+            <pc:docMk/>
+            <pc:sldMk cId="1432869680" sldId="268"/>
+            <ac:spMk id="58" creationId="{491CB2BC-3021-E6B6-2C37-9665CD86D29B}"/>
+          </ac:spMkLst>
+        </pc:spChg>
+        <pc:spChg chg="add mod">
+          <ac:chgData name="Jelle Sjollema" userId="697d5fec-fa16-44ca-847a-2a2a8b0e1e72" providerId="ADAL" clId="{81C8176F-EDA9-42E8-ADD1-2B7E1473E46F}" dt="2026-01-15T11:15:01.706" v="138" actId="20577"/>
+          <ac:spMkLst>
+            <pc:docMk/>
+            <pc:sldMk cId="1432869680" sldId="268"/>
+            <ac:spMk id="59" creationId="{5F64B336-825A-E8A8-EDFF-875AA5E717B6}"/>
+          </ac:spMkLst>
+        </pc:spChg>
+        <pc:spChg chg="add mod">
+          <ac:chgData name="Jelle Sjollema" userId="697d5fec-fa16-44ca-847a-2a2a8b0e1e72" providerId="ADAL" clId="{81C8176F-EDA9-42E8-ADD1-2B7E1473E46F}" dt="2026-01-15T11:17:07.071" v="186" actId="1038"/>
+          <ac:spMkLst>
+            <pc:docMk/>
+            <pc:sldMk cId="1432869680" sldId="268"/>
+            <ac:spMk id="60" creationId="{D5A3604F-D41A-1BAE-ABBA-60E3527880EE}"/>
+          </ac:spMkLst>
+        </pc:spChg>
+        <pc:spChg chg="add mod">
+          <ac:chgData name="Jelle Sjollema" userId="697d5fec-fa16-44ca-847a-2a2a8b0e1e72" providerId="ADAL" clId="{81C8176F-EDA9-42E8-ADD1-2B7E1473E46F}" dt="2026-01-15T11:17:07.071" v="186" actId="1038"/>
+          <ac:spMkLst>
+            <pc:docMk/>
+            <pc:sldMk cId="1432869680" sldId="268"/>
+            <ac:spMk id="61" creationId="{759C4869-0F65-C4D1-25B9-9FD3195C6163}"/>
+          </ac:spMkLst>
+        </pc:spChg>
+        <pc:spChg chg="add mod">
+          <ac:chgData name="Jelle Sjollema" userId="697d5fec-fa16-44ca-847a-2a2a8b0e1e72" providerId="ADAL" clId="{81C8176F-EDA9-42E8-ADD1-2B7E1473E46F}" dt="2026-01-15T11:19:13.302" v="218" actId="1076"/>
+          <ac:spMkLst>
+            <pc:docMk/>
+            <pc:sldMk cId="1432869680" sldId="268"/>
+            <ac:spMk id="67" creationId="{A8C375E8-A781-95B8-F8BF-302EA9F4A96C}"/>
+          </ac:spMkLst>
+        </pc:spChg>
+        <pc:spChg chg="add mod">
+          <ac:chgData name="Jelle Sjollema" userId="697d5fec-fa16-44ca-847a-2a2a8b0e1e72" providerId="ADAL" clId="{81C8176F-EDA9-42E8-ADD1-2B7E1473E46F}" dt="2026-01-15T11:19:35.310" v="222" actId="1076"/>
+          <ac:spMkLst>
+            <pc:docMk/>
+            <pc:sldMk cId="1432869680" sldId="268"/>
+            <ac:spMk id="72" creationId="{760398D4-B4CE-A80A-3537-DF2358B40222}"/>
+          </ac:spMkLst>
+        </pc:spChg>
+        <pc:spChg chg="add mod">
+          <ac:chgData name="Jelle Sjollema" userId="697d5fec-fa16-44ca-847a-2a2a8b0e1e72" providerId="ADAL" clId="{81C8176F-EDA9-42E8-ADD1-2B7E1473E46F}" dt="2026-01-15T11:20:10.772" v="261" actId="1076"/>
+          <ac:spMkLst>
+            <pc:docMk/>
+            <pc:sldMk cId="1432869680" sldId="268"/>
+            <ac:spMk id="73" creationId="{7EB31832-9661-66A0-4F0D-2266EDAEA4FB}"/>
+          </ac:spMkLst>
+        </pc:spChg>
+        <pc:spChg chg="add mod">
+          <ac:chgData name="Jelle Sjollema" userId="697d5fec-fa16-44ca-847a-2a2a8b0e1e72" providerId="ADAL" clId="{81C8176F-EDA9-42E8-ADD1-2B7E1473E46F}" dt="2026-01-15T11:34:10.897" v="269" actId="1076"/>
+          <ac:spMkLst>
+            <pc:docMk/>
+            <pc:sldMk cId="1432869680" sldId="268"/>
+            <ac:spMk id="74" creationId="{5B207565-169B-22D8-EAF8-0CD27B456683}"/>
+          </ac:spMkLst>
+        </pc:spChg>
+        <pc:spChg chg="add mod">
+          <ac:chgData name="Jelle Sjollema" userId="697d5fec-fa16-44ca-847a-2a2a8b0e1e72" providerId="ADAL" clId="{81C8176F-EDA9-42E8-ADD1-2B7E1473E46F}" dt="2026-01-15T11:34:22.988" v="271" actId="1076"/>
+          <ac:spMkLst>
+            <pc:docMk/>
+            <pc:sldMk cId="1432869680" sldId="268"/>
+            <ac:spMk id="75" creationId="{B0ACDC8B-C8E1-D65E-A882-53D88AB9807C}"/>
+          </ac:spMkLst>
+        </pc:spChg>
+        <pc:spChg chg="add mod">
+          <ac:chgData name="Jelle Sjollema" userId="697d5fec-fa16-44ca-847a-2a2a8b0e1e72" providerId="ADAL" clId="{81C8176F-EDA9-42E8-ADD1-2B7E1473E46F}" dt="2026-01-15T11:34:27.287" v="273" actId="1076"/>
+          <ac:spMkLst>
+            <pc:docMk/>
+            <pc:sldMk cId="1432869680" sldId="268"/>
+            <ac:spMk id="76" creationId="{E3293F4D-7941-ABEF-41FE-910784323A50}"/>
+          </ac:spMkLst>
+        </pc:spChg>
+        <pc:spChg chg="add mod">
+          <ac:chgData name="Jelle Sjollema" userId="697d5fec-fa16-44ca-847a-2a2a8b0e1e72" providerId="ADAL" clId="{81C8176F-EDA9-42E8-ADD1-2B7E1473E46F}" dt="2026-01-15T11:34:31.114" v="275" actId="1076"/>
+          <ac:spMkLst>
+            <pc:docMk/>
+            <pc:sldMk cId="1432869680" sldId="268"/>
+            <ac:spMk id="77" creationId="{67081677-0988-45AA-1820-84F578FBE8C4}"/>
+          </ac:spMkLst>
+        </pc:spChg>
+        <pc:spChg chg="add mod">
+          <ac:chgData name="Jelle Sjollema" userId="697d5fec-fa16-44ca-847a-2a2a8b0e1e72" providerId="ADAL" clId="{81C8176F-EDA9-42E8-ADD1-2B7E1473E46F}" dt="2026-01-15T11:34:35.282" v="277" actId="1076"/>
+          <ac:spMkLst>
+            <pc:docMk/>
+            <pc:sldMk cId="1432869680" sldId="268"/>
+            <ac:spMk id="78" creationId="{3CAE2A9B-F174-5791-F004-96ED5DF3AD7C}"/>
+          </ac:spMkLst>
+        </pc:spChg>
+        <pc:spChg chg="add mod">
+          <ac:chgData name="Jelle Sjollema" userId="697d5fec-fa16-44ca-847a-2a2a8b0e1e72" providerId="ADAL" clId="{81C8176F-EDA9-42E8-ADD1-2B7E1473E46F}" dt="2026-01-15T11:34:39.208" v="279" actId="1076"/>
+          <ac:spMkLst>
+            <pc:docMk/>
+            <pc:sldMk cId="1432869680" sldId="268"/>
+            <ac:spMk id="79" creationId="{767849A2-9B90-561A-3A4B-BF2B73A5C492}"/>
+          </ac:spMkLst>
+        </pc:spChg>
+        <pc:spChg chg="add mod">
+          <ac:chgData name="Jelle Sjollema" userId="697d5fec-fa16-44ca-847a-2a2a8b0e1e72" providerId="ADAL" clId="{81C8176F-EDA9-42E8-ADD1-2B7E1473E46F}" dt="2026-01-15T11:35:55.776" v="288" actId="1076"/>
+          <ac:spMkLst>
+            <pc:docMk/>
+            <pc:sldMk cId="1432869680" sldId="268"/>
+            <ac:spMk id="84" creationId="{988F97C6-5957-5A89-9C3A-B39A920F0919}"/>
+          </ac:spMkLst>
+        </pc:spChg>
+        <pc:cxnChg chg="add mod">
+          <ac:chgData name="Jelle Sjollema" userId="697d5fec-fa16-44ca-847a-2a2a8b0e1e72" providerId="ADAL" clId="{81C8176F-EDA9-42E8-ADD1-2B7E1473E46F}" dt="2026-01-15T11:17:15.510" v="187" actId="14100"/>
+          <ac:cxnSpMkLst>
+            <pc:docMk/>
+            <pc:sldMk cId="1432869680" sldId="268"/>
+            <ac:cxnSpMk id="5" creationId="{894A14E8-7145-93CA-B7B4-1DB807FC8319}"/>
+          </ac:cxnSpMkLst>
+        </pc:cxnChg>
+        <pc:cxnChg chg="add mod">
+          <ac:chgData name="Jelle Sjollema" userId="697d5fec-fa16-44ca-847a-2a2a8b0e1e72" providerId="ADAL" clId="{81C8176F-EDA9-42E8-ADD1-2B7E1473E46F}" dt="2026-01-15T11:34:59.173" v="282" actId="14100"/>
+          <ac:cxnSpMkLst>
+            <pc:docMk/>
+            <pc:sldMk cId="1432869680" sldId="268"/>
+            <ac:cxnSpMk id="9" creationId="{1A3E01CE-3275-2981-659C-633F6E0BFD7E}"/>
+          </ac:cxnSpMkLst>
+        </pc:cxnChg>
+        <pc:cxnChg chg="add mod">
+          <ac:chgData name="Jelle Sjollema" userId="697d5fec-fa16-44ca-847a-2a2a8b0e1e72" providerId="ADAL" clId="{81C8176F-EDA9-42E8-ADD1-2B7E1473E46F}" dt="2026-01-15T11:17:26.107" v="189" actId="14100"/>
+          <ac:cxnSpMkLst>
+            <pc:docMk/>
+            <pc:sldMk cId="1432869680" sldId="268"/>
+            <ac:cxnSpMk id="12" creationId="{F051A844-346B-FE10-A7CE-ABF1F0F4E1AA}"/>
+          </ac:cxnSpMkLst>
+        </pc:cxnChg>
+        <pc:cxnChg chg="add mod">
+          <ac:chgData name="Jelle Sjollema" userId="697d5fec-fa16-44ca-847a-2a2a8b0e1e72" providerId="ADAL" clId="{81C8176F-EDA9-42E8-ADD1-2B7E1473E46F}" dt="2026-01-15T11:35:18.930" v="286" actId="14100"/>
+          <ac:cxnSpMkLst>
+            <pc:docMk/>
+            <pc:sldMk cId="1432869680" sldId="268"/>
+            <ac:cxnSpMk id="16" creationId="{ADD15937-6D5C-679F-0A71-E32E749D7AEE}"/>
+          </ac:cxnSpMkLst>
+        </pc:cxnChg>
+        <pc:cxnChg chg="add mod">
+          <ac:chgData name="Jelle Sjollema" userId="697d5fec-fa16-44ca-847a-2a2a8b0e1e72" providerId="ADAL" clId="{81C8176F-EDA9-42E8-ADD1-2B7E1473E46F}" dt="2026-01-15T11:16:01.495" v="157" actId="208"/>
+          <ac:cxnSpMkLst>
+            <pc:docMk/>
+            <pc:sldMk cId="1432869680" sldId="268"/>
+            <ac:cxnSpMk id="17" creationId="{5EF74F4C-5D2E-5D93-4459-AFB5D23D9DC6}"/>
+          </ac:cxnSpMkLst>
+        </pc:cxnChg>
+        <pc:cxnChg chg="add mod">
+          <ac:chgData name="Jelle Sjollema" userId="697d5fec-fa16-44ca-847a-2a2a8b0e1e72" providerId="ADAL" clId="{81C8176F-EDA9-42E8-ADD1-2B7E1473E46F}" dt="2026-01-15T11:35:13.913" v="285" actId="14100"/>
+          <ac:cxnSpMkLst>
+            <pc:docMk/>
+            <pc:sldMk cId="1432869680" sldId="268"/>
+            <ac:cxnSpMk id="20" creationId="{0C2C376D-D411-9964-4332-AA7C99895F5D}"/>
+          </ac:cxnSpMkLst>
+        </pc:cxnChg>
+        <pc:cxnChg chg="add mod">
+          <ac:chgData name="Jelle Sjollema" userId="697d5fec-fa16-44ca-847a-2a2a8b0e1e72" providerId="ADAL" clId="{81C8176F-EDA9-42E8-ADD1-2B7E1473E46F}" dt="2026-01-15T11:16:09.841" v="158" actId="208"/>
+          <ac:cxnSpMkLst>
+            <pc:docMk/>
+            <pc:sldMk cId="1432869680" sldId="268"/>
+            <ac:cxnSpMk id="21" creationId="{50B5ECEE-3FB3-DF0E-CCA7-3150E6105890}"/>
+          </ac:cxnSpMkLst>
+        </pc:cxnChg>
+        <pc:cxnChg chg="add mod">
+          <ac:chgData name="Jelle Sjollema" userId="697d5fec-fa16-44ca-847a-2a2a8b0e1e72" providerId="ADAL" clId="{81C8176F-EDA9-42E8-ADD1-2B7E1473E46F}" dt="2026-01-15T11:15:52.603" v="156" actId="208"/>
+          <ac:cxnSpMkLst>
+            <pc:docMk/>
+            <pc:sldMk cId="1432869680" sldId="268"/>
+            <ac:cxnSpMk id="37" creationId="{D1A58E7C-BCDB-C007-61F9-31C13BBFC105}"/>
+          </ac:cxnSpMkLst>
+        </pc:cxnChg>
+        <pc:cxnChg chg="add mod">
+          <ac:chgData name="Jelle Sjollema" userId="697d5fec-fa16-44ca-847a-2a2a8b0e1e72" providerId="ADAL" clId="{81C8176F-EDA9-42E8-ADD1-2B7E1473E46F}" dt="2026-01-15T11:15:52.603" v="156" actId="208"/>
+          <ac:cxnSpMkLst>
+            <pc:docMk/>
+            <pc:sldMk cId="1432869680" sldId="268"/>
+            <ac:cxnSpMk id="39" creationId="{DE7CF1EF-2B50-5B95-DF6D-B97950193BF3}"/>
+          </ac:cxnSpMkLst>
+        </pc:cxnChg>
+        <pc:cxnChg chg="add mod">
+          <ac:chgData name="Jelle Sjollema" userId="697d5fec-fa16-44ca-847a-2a2a8b0e1e72" providerId="ADAL" clId="{81C8176F-EDA9-42E8-ADD1-2B7E1473E46F}" dt="2026-01-15T11:34:50.506" v="281" actId="14100"/>
+          <ac:cxnSpMkLst>
+            <pc:docMk/>
+            <pc:sldMk cId="1432869680" sldId="268"/>
+            <ac:cxnSpMk id="45" creationId="{EB8DDD16-9A22-86E0-4965-BF2321D56AB7}"/>
+          </ac:cxnSpMkLst>
+        </pc:cxnChg>
+        <pc:cxnChg chg="add mod">
+          <ac:chgData name="Jelle Sjollema" userId="697d5fec-fa16-44ca-847a-2a2a8b0e1e72" providerId="ADAL" clId="{81C8176F-EDA9-42E8-ADD1-2B7E1473E46F}" dt="2026-01-15T11:16:01.495" v="157" actId="208"/>
+          <ac:cxnSpMkLst>
+            <pc:docMk/>
+            <pc:sldMk cId="1432869680" sldId="268"/>
+            <ac:cxnSpMk id="48" creationId="{13377343-16DA-7745-C6E4-7957FFA1E469}"/>
+          </ac:cxnSpMkLst>
+        </pc:cxnChg>
+        <pc:cxnChg chg="add mod">
+          <ac:chgData name="Jelle Sjollema" userId="697d5fec-fa16-44ca-847a-2a2a8b0e1e72" providerId="ADAL" clId="{81C8176F-EDA9-42E8-ADD1-2B7E1473E46F}" dt="2026-01-15T11:16:09.841" v="158" actId="208"/>
+          <ac:cxnSpMkLst>
+            <pc:docMk/>
+            <pc:sldMk cId="1432869680" sldId="268"/>
+            <ac:cxnSpMk id="50" creationId="{9FB66344-968E-89B7-9EEE-539C234C0AC3}"/>
+          </ac:cxnSpMkLst>
+        </pc:cxnChg>
+        <pc:cxnChg chg="add mod">
+          <ac:chgData name="Jelle Sjollema" userId="697d5fec-fa16-44ca-847a-2a2a8b0e1e72" providerId="ADAL" clId="{81C8176F-EDA9-42E8-ADD1-2B7E1473E46F}" dt="2026-01-15T11:17:19.403" v="188" actId="1076"/>
+          <ac:cxnSpMkLst>
+            <pc:docMk/>
+            <pc:sldMk cId="1432869680" sldId="268"/>
+            <ac:cxnSpMk id="52" creationId="{E5CE9898-BF41-1CA4-59D0-B5715816EED5}"/>
+          </ac:cxnSpMkLst>
+        </pc:cxnChg>
+        <pc:cxnChg chg="add mod">
+          <ac:chgData name="Jelle Sjollema" userId="697d5fec-fa16-44ca-847a-2a2a8b0e1e72" providerId="ADAL" clId="{81C8176F-EDA9-42E8-ADD1-2B7E1473E46F}" dt="2026-01-15T11:18:53.474" v="215" actId="14100"/>
+          <ac:cxnSpMkLst>
+            <pc:docMk/>
+            <pc:sldMk cId="1432869680" sldId="268"/>
+            <ac:cxnSpMk id="64" creationId="{462349E5-7D8E-62F8-8E90-778811E0A690}"/>
+          </ac:cxnSpMkLst>
+        </pc:cxnChg>
+        <pc:cxnChg chg="add mod">
+          <ac:chgData name="Jelle Sjollema" userId="697d5fec-fa16-44ca-847a-2a2a8b0e1e72" providerId="ADAL" clId="{81C8176F-EDA9-42E8-ADD1-2B7E1473E46F}" dt="2026-01-15T11:18:45.225" v="213" actId="1076"/>
+          <ac:cxnSpMkLst>
+            <pc:docMk/>
+            <pc:sldMk cId="1432869680" sldId="268"/>
+            <ac:cxnSpMk id="65" creationId="{3B059008-C8EC-06AB-5BC6-54DD85C2433F}"/>
+          </ac:cxnSpMkLst>
+        </pc:cxnChg>
+        <pc:cxnChg chg="add mod">
+          <ac:chgData name="Jelle Sjollema" userId="697d5fec-fa16-44ca-847a-2a2a8b0e1e72" providerId="ADAL" clId="{81C8176F-EDA9-42E8-ADD1-2B7E1473E46F}" dt="2026-01-15T11:18:48.260" v="214" actId="14100"/>
+          <ac:cxnSpMkLst>
+            <pc:docMk/>
+            <pc:sldMk cId="1432869680" sldId="268"/>
+            <ac:cxnSpMk id="66" creationId="{0D38D266-0AE2-0DEA-E29C-2035590C70DD}"/>
+          </ac:cxnSpMkLst>
+        </pc:cxnChg>
+      </pc:sldChg>
+    </pc:docChg>
+  </pc:docChgLst>
+</pc:chgInfo>
+</file>
+
 <file path=ppt/slideLayouts/slideLayout1.xml><?xml version="1.0" encoding="utf-8"?>
 <p:sldLayout xmlns:a="http://schemas.openxmlformats.org/drawingml/2006/main" xmlns:r="http://schemas.openxmlformats.org/officeDocument/2006/relationships" xmlns:p="http://schemas.openxmlformats.org/presentationml/2006/main" type="title" preserve="1">
   <p:cSld name="Titeldia">
@@ -268,7 +641,7 @@
           <a:p>
             <a:fld id="{545DE63F-B6A1-4286-98E5-30D0A12D3C8D}" type="datetimeFigureOut">
               <a:rPr lang="nl-NL" smtClean="0"/>
-              <a:t>14-01-2025</a:t>
+              <a:t>15-1-2026</a:t>
             </a:fld>
             <a:endParaRPr lang="nl-NL"/>
           </a:p>
@@ -322,7 +695,7 @@
           <a:p>
             <a:fld id="{D108F25D-CB0B-4DCB-B2CB-040B5AFE7CE3}" type="slidenum">
               <a:rPr lang="nl-NL" smtClean="0"/>
-              <a:t>‹#›</a:t>
+              <a:t>‹nr.›</a:t>
             </a:fld>
             <a:endParaRPr lang="nl-NL"/>
           </a:p>
@@ -466,7 +839,7 @@
           <a:p>
             <a:fld id="{545DE63F-B6A1-4286-98E5-30D0A12D3C8D}" type="datetimeFigureOut">
               <a:rPr lang="nl-NL" smtClean="0"/>
-              <a:t>14-01-2025</a:t>
+              <a:t>15-1-2026</a:t>
             </a:fld>
             <a:endParaRPr lang="nl-NL"/>
           </a:p>
@@ -520,7 +893,7 @@
           <a:p>
             <a:fld id="{D108F25D-CB0B-4DCB-B2CB-040B5AFE7CE3}" type="slidenum">
               <a:rPr lang="nl-NL" smtClean="0"/>
-              <a:t>‹#›</a:t>
+              <a:t>‹nr.›</a:t>
             </a:fld>
             <a:endParaRPr lang="nl-NL"/>
           </a:p>
@@ -674,7 +1047,7 @@
           <a:p>
             <a:fld id="{545DE63F-B6A1-4286-98E5-30D0A12D3C8D}" type="datetimeFigureOut">
               <a:rPr lang="nl-NL" smtClean="0"/>
-              <a:t>14-01-2025</a:t>
+              <a:t>15-1-2026</a:t>
             </a:fld>
             <a:endParaRPr lang="nl-NL"/>
           </a:p>
@@ -728,7 +1101,7 @@
           <a:p>
             <a:fld id="{D108F25D-CB0B-4DCB-B2CB-040B5AFE7CE3}" type="slidenum">
               <a:rPr lang="nl-NL" smtClean="0"/>
-              <a:t>‹#›</a:t>
+              <a:t>‹nr.›</a:t>
             </a:fld>
             <a:endParaRPr lang="nl-NL"/>
           </a:p>
@@ -872,7 +1245,7 @@
           <a:p>
             <a:fld id="{545DE63F-B6A1-4286-98E5-30D0A12D3C8D}" type="datetimeFigureOut">
               <a:rPr lang="nl-NL" smtClean="0"/>
-              <a:t>14-01-2025</a:t>
+              <a:t>15-1-2026</a:t>
             </a:fld>
             <a:endParaRPr lang="nl-NL"/>
           </a:p>
@@ -926,7 +1299,7 @@
           <a:p>
             <a:fld id="{D108F25D-CB0B-4DCB-B2CB-040B5AFE7CE3}" type="slidenum">
               <a:rPr lang="nl-NL" smtClean="0"/>
-              <a:t>‹#›</a:t>
+              <a:t>‹nr.›</a:t>
             </a:fld>
             <a:endParaRPr lang="nl-NL"/>
           </a:p>
@@ -1147,7 +1520,7 @@
           <a:p>
             <a:fld id="{545DE63F-B6A1-4286-98E5-30D0A12D3C8D}" type="datetimeFigureOut">
               <a:rPr lang="nl-NL" smtClean="0"/>
-              <a:t>14-01-2025</a:t>
+              <a:t>15-1-2026</a:t>
             </a:fld>
             <a:endParaRPr lang="nl-NL"/>
           </a:p>
@@ -1201,7 +1574,7 @@
           <a:p>
             <a:fld id="{D108F25D-CB0B-4DCB-B2CB-040B5AFE7CE3}" type="slidenum">
               <a:rPr lang="nl-NL" smtClean="0"/>
-              <a:t>‹#›</a:t>
+              <a:t>‹nr.›</a:t>
             </a:fld>
             <a:endParaRPr lang="nl-NL"/>
           </a:p>
@@ -1412,7 +1785,7 @@
           <a:p>
             <a:fld id="{545DE63F-B6A1-4286-98E5-30D0A12D3C8D}" type="datetimeFigureOut">
               <a:rPr lang="nl-NL" smtClean="0"/>
-              <a:t>14-01-2025</a:t>
+              <a:t>15-1-2026</a:t>
             </a:fld>
             <a:endParaRPr lang="nl-NL"/>
           </a:p>
@@ -1466,7 +1839,7 @@
           <a:p>
             <a:fld id="{D108F25D-CB0B-4DCB-B2CB-040B5AFE7CE3}" type="slidenum">
               <a:rPr lang="nl-NL" smtClean="0"/>
-              <a:t>‹#›</a:t>
+              <a:t>‹nr.›</a:t>
             </a:fld>
             <a:endParaRPr lang="nl-NL"/>
           </a:p>
@@ -1824,7 +2197,7 @@
           <a:p>
             <a:fld id="{545DE63F-B6A1-4286-98E5-30D0A12D3C8D}" type="datetimeFigureOut">
               <a:rPr lang="nl-NL" smtClean="0"/>
-              <a:t>14-01-2025</a:t>
+              <a:t>15-1-2026</a:t>
             </a:fld>
             <a:endParaRPr lang="nl-NL"/>
           </a:p>
@@ -1878,7 +2251,7 @@
           <a:p>
             <a:fld id="{D108F25D-CB0B-4DCB-B2CB-040B5AFE7CE3}" type="slidenum">
               <a:rPr lang="nl-NL" smtClean="0"/>
-              <a:t>‹#›</a:t>
+              <a:t>‹nr.›</a:t>
             </a:fld>
             <a:endParaRPr lang="nl-NL"/>
           </a:p>
@@ -1965,7 +2338,7 @@
           <a:p>
             <a:fld id="{545DE63F-B6A1-4286-98E5-30D0A12D3C8D}" type="datetimeFigureOut">
               <a:rPr lang="nl-NL" smtClean="0"/>
-              <a:t>14-01-2025</a:t>
+              <a:t>15-1-2026</a:t>
             </a:fld>
             <a:endParaRPr lang="nl-NL"/>
           </a:p>
@@ -2019,7 +2392,7 @@
           <a:p>
             <a:fld id="{D108F25D-CB0B-4DCB-B2CB-040B5AFE7CE3}" type="slidenum">
               <a:rPr lang="nl-NL" smtClean="0"/>
-              <a:t>‹#›</a:t>
+              <a:t>‹nr.›</a:t>
             </a:fld>
             <a:endParaRPr lang="nl-NL"/>
           </a:p>
@@ -2078,7 +2451,7 @@
           <a:p>
             <a:fld id="{545DE63F-B6A1-4286-98E5-30D0A12D3C8D}" type="datetimeFigureOut">
               <a:rPr lang="nl-NL" smtClean="0"/>
-              <a:t>14-01-2025</a:t>
+              <a:t>15-1-2026</a:t>
             </a:fld>
             <a:endParaRPr lang="nl-NL"/>
           </a:p>
@@ -2132,7 +2505,7 @@
           <a:p>
             <a:fld id="{D108F25D-CB0B-4DCB-B2CB-040B5AFE7CE3}" type="slidenum">
               <a:rPr lang="nl-NL" smtClean="0"/>
-              <a:t>‹#›</a:t>
+              <a:t>‹nr.›</a:t>
             </a:fld>
             <a:endParaRPr lang="nl-NL"/>
           </a:p>
@@ -2389,7 +2762,7 @@
           <a:p>
             <a:fld id="{545DE63F-B6A1-4286-98E5-30D0A12D3C8D}" type="datetimeFigureOut">
               <a:rPr lang="nl-NL" smtClean="0"/>
-              <a:t>14-01-2025</a:t>
+              <a:t>15-1-2026</a:t>
             </a:fld>
             <a:endParaRPr lang="nl-NL"/>
           </a:p>
@@ -2443,7 +2816,7 @@
           <a:p>
             <a:fld id="{D108F25D-CB0B-4DCB-B2CB-040B5AFE7CE3}" type="slidenum">
               <a:rPr lang="nl-NL" smtClean="0"/>
-              <a:t>‹#›</a:t>
+              <a:t>‹nr.›</a:t>
             </a:fld>
             <a:endParaRPr lang="nl-NL"/>
           </a:p>
@@ -2677,7 +3050,7 @@
           <a:p>
             <a:fld id="{545DE63F-B6A1-4286-98E5-30D0A12D3C8D}" type="datetimeFigureOut">
               <a:rPr lang="nl-NL" smtClean="0"/>
-              <a:t>14-01-2025</a:t>
+              <a:t>15-1-2026</a:t>
             </a:fld>
             <a:endParaRPr lang="nl-NL"/>
           </a:p>
@@ -2731,7 +3104,7 @@
           <a:p>
             <a:fld id="{D108F25D-CB0B-4DCB-B2CB-040B5AFE7CE3}" type="slidenum">
               <a:rPr lang="nl-NL" smtClean="0"/>
-              <a:t>‹#›</a:t>
+              <a:t>‹nr.›</a:t>
             </a:fld>
             <a:endParaRPr lang="nl-NL"/>
           </a:p>
@@ -2918,7 +3291,7 @@
           <a:p>
             <a:fld id="{545DE63F-B6A1-4286-98E5-30D0A12D3C8D}" type="datetimeFigureOut">
               <a:rPr lang="nl-NL" smtClean="0"/>
-              <a:t>14-01-2025</a:t>
+              <a:t>15-1-2026</a:t>
             </a:fld>
             <a:endParaRPr lang="nl-NL"/>
           </a:p>
@@ -3008,7 +3381,7 @@
           <a:p>
             <a:fld id="{D108F25D-CB0B-4DCB-B2CB-040B5AFE7CE3}" type="slidenum">
               <a:rPr lang="nl-NL" smtClean="0"/>
-              <a:t>‹#›</a:t>
+              <a:t>‹nr.›</a:t>
             </a:fld>
             <a:endParaRPr lang="nl-NL"/>
           </a:p>
@@ -4262,7 +4635,7 @@
           <p:cNvPr id="2" name="Titel 1">
             <a:extLst>
               <a:ext uri="{FF2B5EF4-FFF2-40B4-BE49-F238E27FC236}">
-                <a16:creationId xmlns:a16="http://schemas.microsoft.com/office/drawing/2014/main" id="{9141961A-4E03-4462-1550-F5327069EC08}"/>
+                <a16:creationId xmlns:a16="http://schemas.microsoft.com/office/drawing/2014/main" id="{B04F239A-5374-F153-5A85-9F6BFAFE8989}"/>
               </a:ext>
             </a:extLst>
           </p:cNvPr>
@@ -4280,7 +4653,19 @@
           <a:p>
             <a:r>
               <a:rPr lang="en-US" dirty="0"/>
-              <a:t>De Release Branch</a:t>
+              <a:t>De </a:t>
+            </a:r>
+            <a:r>
+              <a:rPr lang="en-US" dirty="0">
+                <a:solidFill>
+                  <a:srgbClr val="FF0000"/>
+                </a:solidFill>
+              </a:rPr>
+              <a:t>hotfix</a:t>
+            </a:r>
+            <a:r>
+              <a:rPr lang="en-US" dirty="0"/>
+              <a:t> Branch</a:t>
             </a:r>
             <a:endParaRPr lang="nl-NL" dirty="0"/>
           </a:p>
@@ -4291,7 +4676,7 @@
           <p:cNvPr id="3" name="Tijdelijke aanduiding voor inhoud 2">
             <a:extLst>
               <a:ext uri="{FF2B5EF4-FFF2-40B4-BE49-F238E27FC236}">
-                <a16:creationId xmlns:a16="http://schemas.microsoft.com/office/drawing/2014/main" id="{6C6C7365-2279-2375-FF61-F751FF158F4F}"/>
+                <a16:creationId xmlns:a16="http://schemas.microsoft.com/office/drawing/2014/main" id="{E2637FF3-CF8B-2B79-6610-BC941766FD57}"/>
               </a:ext>
             </a:extLst>
           </p:cNvPr>
@@ -4309,7 +4694,7 @@
           <a:p>
             <a:r>
               <a:rPr lang="nl-NL" dirty="0"/>
-              <a:t>Gebruikt om een nieuwe release voor te bereiden.</a:t>
+              <a:t>Gebruikt om snel kritieke bugs in productie op te lossen.</a:t>
             </a:r>
           </a:p>
           <a:p>
@@ -4319,7 +4704,7 @@
             </a:r>
             <a:r>
               <a:rPr lang="nl-NL" dirty="0" err="1"/>
-              <a:t>develop</a:t>
+              <a:t>main</a:t>
             </a:r>
             <a:r>
               <a:rPr lang="nl-NL" dirty="0"/>
@@ -4353,7 +4738,23 @@
           <a:p>
             <a:r>
               <a:rPr lang="nl-NL" dirty="0"/>
-              <a:t>Naamgeving: release/&lt;versie-nummer&gt;.</a:t>
+              <a:t>Naamgeving: </a:t>
+            </a:r>
+            <a:r>
+              <a:rPr lang="nl-NL" dirty="0" err="1"/>
+              <a:t>hotfix</a:t>
+            </a:r>
+            <a:r>
+              <a:rPr lang="nl-NL" dirty="0"/>
+              <a:t>/&lt;</a:t>
+            </a:r>
+            <a:r>
+              <a:rPr lang="nl-NL" dirty="0" err="1"/>
+              <a:t>hotfix</a:t>
+            </a:r>
+            <a:r>
+              <a:rPr lang="nl-NL" dirty="0"/>
+              <a:t>-naam&gt;.</a:t>
             </a:r>
           </a:p>
         </p:txBody>
@@ -4361,7 +4762,7 @@
     </p:spTree>
     <p:extLst>
       <p:ext uri="{BB962C8B-B14F-4D97-AF65-F5344CB8AC3E}">
-        <p14:creationId xmlns:p14="http://schemas.microsoft.com/office/powerpoint/2010/main" val="1861808845"/>
+        <p14:creationId xmlns:p14="http://schemas.microsoft.com/office/powerpoint/2010/main" val="1635346009"/>
       </p:ext>
     </p:extLst>
   </p:cSld>
@@ -4393,7 +4794,7 @@
           <p:cNvPr id="2" name="Titel 1">
             <a:extLst>
               <a:ext uri="{FF2B5EF4-FFF2-40B4-BE49-F238E27FC236}">
-                <a16:creationId xmlns:a16="http://schemas.microsoft.com/office/drawing/2014/main" id="{B04F239A-5374-F153-5A85-9F6BFAFE8989}"/>
+                <a16:creationId xmlns:a16="http://schemas.microsoft.com/office/drawing/2014/main" id="{999DD0BF-2B26-A975-2D35-1B61281518E4}"/>
               </a:ext>
             </a:extLst>
           </p:cNvPr>
@@ -4410,117 +4811,2022 @@
           <a:lstStyle/>
           <a:p>
             <a:r>
+              <a:rPr lang="en-US" dirty="0" err="1"/>
+              <a:t>Samenvatting</a:t>
+            </a:r>
+            <a:r>
               <a:rPr lang="en-US" dirty="0"/>
-              <a:t>De </a:t>
-            </a:r>
-            <a:r>
-              <a:rPr lang="en-US" dirty="0">
-                <a:solidFill>
-                  <a:srgbClr val="FF0000"/>
-                </a:solidFill>
-              </a:rPr>
-              <a:t>hotfix</a:t>
-            </a:r>
+              <a:t> basic </a:t>
+            </a:r>
+            <a:r>
+              <a:rPr lang="en-US" dirty="0" err="1"/>
+              <a:t>Gitflow</a:t>
+            </a:r>
+            <a:endParaRPr lang="nl-NL" dirty="0"/>
+          </a:p>
+        </p:txBody>
+      </p:sp>
+      <p:cxnSp>
+        <p:nvCxnSpPr>
+          <p:cNvPr id="5" name="Rechte verbindingslijn 4">
+            <a:extLst>
+              <a:ext uri="{FF2B5EF4-FFF2-40B4-BE49-F238E27FC236}">
+                <a16:creationId xmlns:a16="http://schemas.microsoft.com/office/drawing/2014/main" id="{894A14E8-7145-93CA-B7B4-1DB807FC8319}"/>
+              </a:ext>
+            </a:extLst>
+          </p:cNvPr>
+          <p:cNvCxnSpPr>
+            <a:cxnSpLocks/>
+          </p:cNvCxnSpPr>
+          <p:nvPr/>
+        </p:nvCxnSpPr>
+        <p:spPr>
+          <a:xfrm>
+            <a:off x="369652" y="2694562"/>
+            <a:ext cx="11721829" cy="23355"/>
+          </a:xfrm>
+          <a:prstGeom prst="line">
+            <a:avLst/>
+          </a:prstGeom>
+          <a:ln w="57150"/>
+        </p:spPr>
+        <p:style>
+          <a:lnRef idx="2">
+            <a:schemeClr val="accent1"/>
+          </a:lnRef>
+          <a:fillRef idx="0">
+            <a:schemeClr val="accent1"/>
+          </a:fillRef>
+          <a:effectRef idx="1">
+            <a:schemeClr val="accent1"/>
+          </a:effectRef>
+          <a:fontRef idx="minor">
+            <a:schemeClr val="tx1"/>
+          </a:fontRef>
+        </p:style>
+      </p:cxnSp>
+      <p:sp>
+        <p:nvSpPr>
+          <p:cNvPr id="6" name="Tekstvak 5">
+            <a:extLst>
+              <a:ext uri="{FF2B5EF4-FFF2-40B4-BE49-F238E27FC236}">
+                <a16:creationId xmlns:a16="http://schemas.microsoft.com/office/drawing/2014/main" id="{34EA9D95-8100-FADA-FEFB-75C7B5C5D743}"/>
+              </a:ext>
+            </a:extLst>
+          </p:cNvPr>
+          <p:cNvSpPr txBox="1"/>
+          <p:nvPr/>
+        </p:nvSpPr>
+        <p:spPr>
+          <a:xfrm>
+            <a:off x="590959" y="2258594"/>
+            <a:ext cx="686406" cy="369332"/>
+          </a:xfrm>
+          <a:prstGeom prst="rect">
+            <a:avLst/>
+          </a:prstGeom>
+          <a:noFill/>
+        </p:spPr>
+        <p:txBody>
+          <a:bodyPr wrap="none" rtlCol="0">
+            <a:spAutoFit/>
+          </a:bodyPr>
+          <a:lstStyle/>
+          <a:p>
             <a:r>
               <a:rPr lang="en-US" dirty="0"/>
-              <a:t> Branch</a:t>
+              <a:t>main</a:t>
             </a:r>
             <a:endParaRPr lang="nl-NL" dirty="0"/>
           </a:p>
         </p:txBody>
       </p:sp>
-      <p:sp>
-        <p:nvSpPr>
-          <p:cNvPr id="3" name="Tijdelijke aanduiding voor inhoud 2">
-            <a:extLst>
-              <a:ext uri="{FF2B5EF4-FFF2-40B4-BE49-F238E27FC236}">
-                <a16:creationId xmlns:a16="http://schemas.microsoft.com/office/drawing/2014/main" id="{E2637FF3-CF8B-2B79-6610-BC941766FD57}"/>
-              </a:ext>
-            </a:extLst>
-          </p:cNvPr>
-          <p:cNvSpPr>
-            <a:spLocks noGrp="1"/>
-          </p:cNvSpPr>
-          <p:nvPr>
-            <p:ph idx="1"/>
-          </p:nvPr>
-        </p:nvSpPr>
-        <p:spPr/>
-        <p:txBody>
-          <a:bodyPr/>
-          <a:lstStyle/>
-          <a:p>
-            <a:r>
-              <a:rPr lang="nl-NL" dirty="0"/>
-              <a:t>Gebruikt om snel kritieke bugs in productie op te lossen.</a:t>
-            </a:r>
-          </a:p>
-          <a:p>
-            <a:r>
-              <a:rPr lang="nl-NL" dirty="0"/>
-              <a:t>Wordt gestart vanuit </a:t>
-            </a:r>
-            <a:r>
-              <a:rPr lang="nl-NL" dirty="0" err="1"/>
-              <a:t>main</a:t>
-            </a:r>
-            <a:r>
-              <a:rPr lang="nl-NL" dirty="0"/>
-              <a:t> en </a:t>
-            </a:r>
-            <a:r>
-              <a:rPr lang="nl-NL" dirty="0" err="1"/>
-              <a:t>gemerged</a:t>
-            </a:r>
-            <a:r>
-              <a:rPr lang="nl-NL" dirty="0"/>
-              <a:t> naar zowel </a:t>
-            </a:r>
-            <a:r>
-              <a:rPr lang="nl-NL" dirty="0" err="1"/>
-              <a:t>main</a:t>
-            </a:r>
-            <a:r>
-              <a:rPr lang="nl-NL" dirty="0"/>
-              <a:t> als </a:t>
-            </a:r>
-            <a:r>
-              <a:rPr lang="nl-NL" dirty="0" err="1"/>
+      <p:cxnSp>
+        <p:nvCxnSpPr>
+          <p:cNvPr id="9" name="Rechte verbindingslijn 8">
+            <a:extLst>
+              <a:ext uri="{FF2B5EF4-FFF2-40B4-BE49-F238E27FC236}">
+                <a16:creationId xmlns:a16="http://schemas.microsoft.com/office/drawing/2014/main" id="{1A3E01CE-3275-2981-659C-633F6E0BFD7E}"/>
+              </a:ext>
+            </a:extLst>
+          </p:cNvPr>
+          <p:cNvCxnSpPr>
+            <a:cxnSpLocks/>
+          </p:cNvCxnSpPr>
+          <p:nvPr/>
+        </p:nvCxnSpPr>
+        <p:spPr>
+          <a:xfrm>
+            <a:off x="228232" y="2694562"/>
+            <a:ext cx="883578" cy="724512"/>
+          </a:xfrm>
+          <a:prstGeom prst="line">
+            <a:avLst/>
+          </a:prstGeom>
+          <a:ln w="57150">
+            <a:solidFill>
+              <a:schemeClr val="accent5"/>
+            </a:solidFill>
+          </a:ln>
+        </p:spPr>
+        <p:style>
+          <a:lnRef idx="2">
+            <a:schemeClr val="accent1"/>
+          </a:lnRef>
+          <a:fillRef idx="0">
+            <a:schemeClr val="accent1"/>
+          </a:fillRef>
+          <a:effectRef idx="1">
+            <a:schemeClr val="accent1"/>
+          </a:effectRef>
+          <a:fontRef idx="minor">
+            <a:schemeClr val="tx1"/>
+          </a:fontRef>
+        </p:style>
+      </p:cxnSp>
+      <p:cxnSp>
+        <p:nvCxnSpPr>
+          <p:cNvPr id="12" name="Rechte verbindingslijn 11">
+            <a:extLst>
+              <a:ext uri="{FF2B5EF4-FFF2-40B4-BE49-F238E27FC236}">
+                <a16:creationId xmlns:a16="http://schemas.microsoft.com/office/drawing/2014/main" id="{F051A844-346B-FE10-A7CE-ABF1F0F4E1AA}"/>
+              </a:ext>
+            </a:extLst>
+          </p:cNvPr>
+          <p:cNvCxnSpPr>
+            <a:cxnSpLocks/>
+          </p:cNvCxnSpPr>
+          <p:nvPr/>
+        </p:nvCxnSpPr>
+        <p:spPr>
+          <a:xfrm flipV="1">
+            <a:off x="1339175" y="3508746"/>
+            <a:ext cx="10674485" cy="2"/>
+          </a:xfrm>
+          <a:prstGeom prst="line">
+            <a:avLst/>
+          </a:prstGeom>
+          <a:ln w="57150">
+            <a:solidFill>
+              <a:schemeClr val="accent5"/>
+            </a:solidFill>
+          </a:ln>
+        </p:spPr>
+        <p:style>
+          <a:lnRef idx="2">
+            <a:schemeClr val="accent1"/>
+          </a:lnRef>
+          <a:fillRef idx="0">
+            <a:schemeClr val="accent1"/>
+          </a:fillRef>
+          <a:effectRef idx="1">
+            <a:schemeClr val="accent1"/>
+          </a:effectRef>
+          <a:fontRef idx="minor">
+            <a:schemeClr val="tx1"/>
+          </a:fontRef>
+        </p:style>
+      </p:cxnSp>
+      <p:sp>
+        <p:nvSpPr>
+          <p:cNvPr id="14" name="Tekstvak 13">
+            <a:extLst>
+              <a:ext uri="{FF2B5EF4-FFF2-40B4-BE49-F238E27FC236}">
+                <a16:creationId xmlns:a16="http://schemas.microsoft.com/office/drawing/2014/main" id="{40D00685-6489-A3AC-FC86-11AF79329711}"/>
+              </a:ext>
+            </a:extLst>
+          </p:cNvPr>
+          <p:cNvSpPr txBox="1"/>
+          <p:nvPr/>
+        </p:nvSpPr>
+        <p:spPr>
+          <a:xfrm>
+            <a:off x="1277365" y="3056577"/>
+            <a:ext cx="975652" cy="369332"/>
+          </a:xfrm>
+          <a:prstGeom prst="rect">
+            <a:avLst/>
+          </a:prstGeom>
+          <a:noFill/>
+        </p:spPr>
+        <p:txBody>
+          <a:bodyPr wrap="none" rtlCol="0">
+            <a:spAutoFit/>
+          </a:bodyPr>
+          <a:lstStyle/>
+          <a:p>
+            <a:r>
+              <a:rPr lang="en-US" dirty="0"/>
               <a:t>develop</a:t>
             </a:r>
-            <a:r>
-              <a:rPr lang="nl-NL" dirty="0"/>
-              <a:t>.</a:t>
-            </a:r>
-          </a:p>
-          <a:p>
-            <a:r>
-              <a:rPr lang="nl-NL" dirty="0"/>
-              <a:t>Naamgeving: </a:t>
-            </a:r>
-            <a:r>
-              <a:rPr lang="nl-NL" dirty="0" err="1"/>
-              <a:t>hotfix</a:t>
-            </a:r>
-            <a:r>
-              <a:rPr lang="nl-NL" dirty="0"/>
-              <a:t>/&lt;</a:t>
-            </a:r>
-            <a:r>
-              <a:rPr lang="nl-NL" dirty="0" err="1"/>
-              <a:t>hotfix</a:t>
-            </a:r>
-            <a:r>
-              <a:rPr lang="nl-NL" dirty="0"/>
-              <a:t>-naam&gt;.</a:t>
-            </a:r>
+            <a:endParaRPr lang="nl-NL" dirty="0"/>
+          </a:p>
+        </p:txBody>
+      </p:sp>
+      <p:sp>
+        <p:nvSpPr>
+          <p:cNvPr id="15" name="Ovaal 14">
+            <a:extLst>
+              <a:ext uri="{FF2B5EF4-FFF2-40B4-BE49-F238E27FC236}">
+                <a16:creationId xmlns:a16="http://schemas.microsoft.com/office/drawing/2014/main" id="{EFBFC290-F8F2-095F-185D-D7EB3A55E31B}"/>
+              </a:ext>
+            </a:extLst>
+          </p:cNvPr>
+          <p:cNvSpPr/>
+          <p:nvPr/>
+        </p:nvSpPr>
+        <p:spPr>
+          <a:xfrm>
+            <a:off x="2289242" y="3402131"/>
+            <a:ext cx="301558" cy="301558"/>
+          </a:xfrm>
+          <a:prstGeom prst="ellipse">
+            <a:avLst/>
+          </a:prstGeom>
+          <a:solidFill>
+            <a:schemeClr val="bg1"/>
+          </a:solidFill>
+        </p:spPr>
+        <p:style>
+          <a:lnRef idx="2">
+            <a:schemeClr val="accent1">
+              <a:shade val="15000"/>
+            </a:schemeClr>
+          </a:lnRef>
+          <a:fillRef idx="1">
+            <a:schemeClr val="accent1"/>
+          </a:fillRef>
+          <a:effectRef idx="0">
+            <a:schemeClr val="accent1"/>
+          </a:effectRef>
+          <a:fontRef idx="minor">
+            <a:schemeClr val="lt1"/>
+          </a:fontRef>
+        </p:style>
+        <p:txBody>
+          <a:bodyPr rtlCol="0" anchor="ctr"/>
+          <a:lstStyle/>
+          <a:p>
+            <a:pPr algn="ctr"/>
+            <a:endParaRPr lang="nl-NL">
+              <a:solidFill>
+                <a:schemeClr val="bg1"/>
+              </a:solidFill>
+            </a:endParaRPr>
+          </a:p>
+        </p:txBody>
+      </p:sp>
+      <p:cxnSp>
+        <p:nvCxnSpPr>
+          <p:cNvPr id="16" name="Rechte verbindingslijn 15">
+            <a:extLst>
+              <a:ext uri="{FF2B5EF4-FFF2-40B4-BE49-F238E27FC236}">
+                <a16:creationId xmlns:a16="http://schemas.microsoft.com/office/drawing/2014/main" id="{ADD15937-6D5C-679F-0A71-E32E749D7AEE}"/>
+              </a:ext>
+            </a:extLst>
+          </p:cNvPr>
+          <p:cNvCxnSpPr>
+            <a:cxnSpLocks/>
+            <a:stCxn id="15" idx="4"/>
+          </p:cNvCxnSpPr>
+          <p:nvPr/>
+        </p:nvCxnSpPr>
+        <p:spPr>
+          <a:xfrm>
+            <a:off x="2440021" y="3703689"/>
+            <a:ext cx="1226073" cy="1997683"/>
+          </a:xfrm>
+          <a:prstGeom prst="line">
+            <a:avLst/>
+          </a:prstGeom>
+          <a:ln w="57150">
+            <a:solidFill>
+              <a:srgbClr val="FFC000"/>
+            </a:solidFill>
+          </a:ln>
+        </p:spPr>
+        <p:style>
+          <a:lnRef idx="2">
+            <a:schemeClr val="accent1"/>
+          </a:lnRef>
+          <a:fillRef idx="0">
+            <a:schemeClr val="accent1"/>
+          </a:fillRef>
+          <a:effectRef idx="1">
+            <a:schemeClr val="accent1"/>
+          </a:effectRef>
+          <a:fontRef idx="minor">
+            <a:schemeClr val="tx1"/>
+          </a:fontRef>
+        </p:style>
+      </p:cxnSp>
+      <p:cxnSp>
+        <p:nvCxnSpPr>
+          <p:cNvPr id="17" name="Rechte verbindingslijn 16">
+            <a:extLst>
+              <a:ext uri="{FF2B5EF4-FFF2-40B4-BE49-F238E27FC236}">
+                <a16:creationId xmlns:a16="http://schemas.microsoft.com/office/drawing/2014/main" id="{5EF74F4C-5D2E-5D93-4459-AFB5D23D9DC6}"/>
+              </a:ext>
+            </a:extLst>
+          </p:cNvPr>
+          <p:cNvCxnSpPr>
+            <a:cxnSpLocks/>
+            <a:endCxn id="41" idx="2"/>
+          </p:cNvCxnSpPr>
+          <p:nvPr/>
+        </p:nvCxnSpPr>
+        <p:spPr>
+          <a:xfrm flipV="1">
+            <a:off x="3666094" y="5651067"/>
+            <a:ext cx="3180559" cy="24626"/>
+          </a:xfrm>
+          <a:prstGeom prst="line">
+            <a:avLst/>
+          </a:prstGeom>
+          <a:ln w="57150">
+            <a:solidFill>
+              <a:srgbClr val="FFC000"/>
+            </a:solidFill>
+          </a:ln>
+        </p:spPr>
+        <p:style>
+          <a:lnRef idx="2">
+            <a:schemeClr val="accent1"/>
+          </a:lnRef>
+          <a:fillRef idx="0">
+            <a:schemeClr val="accent1"/>
+          </a:fillRef>
+          <a:effectRef idx="1">
+            <a:schemeClr val="accent1"/>
+          </a:effectRef>
+          <a:fontRef idx="minor">
+            <a:schemeClr val="tx1"/>
+          </a:fontRef>
+        </p:style>
+      </p:cxnSp>
+      <p:sp>
+        <p:nvSpPr>
+          <p:cNvPr id="19" name="Ovaal 18">
+            <a:extLst>
+              <a:ext uri="{FF2B5EF4-FFF2-40B4-BE49-F238E27FC236}">
+                <a16:creationId xmlns:a16="http://schemas.microsoft.com/office/drawing/2014/main" id="{1D99D054-4CC2-196B-3E72-0E516F913F34}"/>
+              </a:ext>
+            </a:extLst>
+          </p:cNvPr>
+          <p:cNvSpPr/>
+          <p:nvPr/>
+        </p:nvSpPr>
+        <p:spPr>
+          <a:xfrm>
+            <a:off x="1640733" y="3402131"/>
+            <a:ext cx="301558" cy="301558"/>
+          </a:xfrm>
+          <a:prstGeom prst="ellipse">
+            <a:avLst/>
+          </a:prstGeom>
+          <a:solidFill>
+            <a:schemeClr val="bg1"/>
+          </a:solidFill>
+        </p:spPr>
+        <p:style>
+          <a:lnRef idx="2">
+            <a:schemeClr val="accent1">
+              <a:shade val="15000"/>
+            </a:schemeClr>
+          </a:lnRef>
+          <a:fillRef idx="1">
+            <a:schemeClr val="accent1"/>
+          </a:fillRef>
+          <a:effectRef idx="0">
+            <a:schemeClr val="accent1"/>
+          </a:effectRef>
+          <a:fontRef idx="minor">
+            <a:schemeClr val="lt1"/>
+          </a:fontRef>
+        </p:style>
+        <p:txBody>
+          <a:bodyPr rtlCol="0" anchor="ctr"/>
+          <a:lstStyle/>
+          <a:p>
+            <a:pPr algn="ctr"/>
+            <a:endParaRPr lang="nl-NL">
+              <a:solidFill>
+                <a:schemeClr val="bg1"/>
+              </a:solidFill>
+            </a:endParaRPr>
+          </a:p>
+        </p:txBody>
+      </p:sp>
+      <p:cxnSp>
+        <p:nvCxnSpPr>
+          <p:cNvPr id="20" name="Rechte verbindingslijn 19">
+            <a:extLst>
+              <a:ext uri="{FF2B5EF4-FFF2-40B4-BE49-F238E27FC236}">
+                <a16:creationId xmlns:a16="http://schemas.microsoft.com/office/drawing/2014/main" id="{0C2C376D-D411-9964-4332-AA7C99895F5D}"/>
+              </a:ext>
+            </a:extLst>
+          </p:cNvPr>
+          <p:cNvCxnSpPr>
+            <a:cxnSpLocks/>
+            <a:stCxn id="19" idx="4"/>
+          </p:cNvCxnSpPr>
+          <p:nvPr/>
+        </p:nvCxnSpPr>
+        <p:spPr>
+          <a:xfrm>
+            <a:off x="1791512" y="3703689"/>
+            <a:ext cx="1485475" cy="2658200"/>
+          </a:xfrm>
+          <a:prstGeom prst="line">
+            <a:avLst/>
+          </a:prstGeom>
+          <a:ln w="57150">
+            <a:solidFill>
+              <a:srgbClr val="00B0F0"/>
+            </a:solidFill>
+          </a:ln>
+        </p:spPr>
+        <p:style>
+          <a:lnRef idx="2">
+            <a:schemeClr val="accent1"/>
+          </a:lnRef>
+          <a:fillRef idx="0">
+            <a:schemeClr val="accent1"/>
+          </a:fillRef>
+          <a:effectRef idx="1">
+            <a:schemeClr val="accent1"/>
+          </a:effectRef>
+          <a:fontRef idx="minor">
+            <a:schemeClr val="tx1"/>
+          </a:fontRef>
+        </p:style>
+      </p:cxnSp>
+      <p:cxnSp>
+        <p:nvCxnSpPr>
+          <p:cNvPr id="21" name="Rechte verbindingslijn 20">
+            <a:extLst>
+              <a:ext uri="{FF2B5EF4-FFF2-40B4-BE49-F238E27FC236}">
+                <a16:creationId xmlns:a16="http://schemas.microsoft.com/office/drawing/2014/main" id="{50B5ECEE-3FB3-DF0E-CCA7-3150E6105890}"/>
+              </a:ext>
+            </a:extLst>
+          </p:cNvPr>
+          <p:cNvCxnSpPr>
+            <a:cxnSpLocks/>
+            <a:endCxn id="42" idx="2"/>
+          </p:cNvCxnSpPr>
+          <p:nvPr/>
+        </p:nvCxnSpPr>
+        <p:spPr>
+          <a:xfrm flipV="1">
+            <a:off x="3276987" y="6305112"/>
+            <a:ext cx="3871224" cy="56777"/>
+          </a:xfrm>
+          <a:prstGeom prst="line">
+            <a:avLst/>
+          </a:prstGeom>
+          <a:ln w="57150">
+            <a:solidFill>
+              <a:srgbClr val="00B0F0"/>
+            </a:solidFill>
+          </a:ln>
+        </p:spPr>
+        <p:style>
+          <a:lnRef idx="2">
+            <a:schemeClr val="accent1"/>
+          </a:lnRef>
+          <a:fillRef idx="0">
+            <a:schemeClr val="accent1"/>
+          </a:fillRef>
+          <a:effectRef idx="1">
+            <a:schemeClr val="accent1"/>
+          </a:effectRef>
+          <a:fontRef idx="minor">
+            <a:schemeClr val="tx1"/>
+          </a:fontRef>
+        </p:style>
+      </p:cxnSp>
+      <p:sp>
+        <p:nvSpPr>
+          <p:cNvPr id="36" name="Ovaal 35">
+            <a:extLst>
+              <a:ext uri="{FF2B5EF4-FFF2-40B4-BE49-F238E27FC236}">
+                <a16:creationId xmlns:a16="http://schemas.microsoft.com/office/drawing/2014/main" id="{E52793BE-12CA-09CD-3029-14746D6FE477}"/>
+              </a:ext>
+            </a:extLst>
+          </p:cNvPr>
+          <p:cNvSpPr/>
+          <p:nvPr/>
+        </p:nvSpPr>
+        <p:spPr>
+          <a:xfrm>
+            <a:off x="3427766" y="3380758"/>
+            <a:ext cx="301558" cy="301558"/>
+          </a:xfrm>
+          <a:prstGeom prst="ellipse">
+            <a:avLst/>
+          </a:prstGeom>
+          <a:solidFill>
+            <a:schemeClr val="bg1"/>
+          </a:solidFill>
+        </p:spPr>
+        <p:style>
+          <a:lnRef idx="2">
+            <a:schemeClr val="accent1">
+              <a:shade val="15000"/>
+            </a:schemeClr>
+          </a:lnRef>
+          <a:fillRef idx="1">
+            <a:schemeClr val="accent1"/>
+          </a:fillRef>
+          <a:effectRef idx="0">
+            <a:schemeClr val="accent1"/>
+          </a:effectRef>
+          <a:fontRef idx="minor">
+            <a:schemeClr val="lt1"/>
+          </a:fontRef>
+        </p:style>
+        <p:txBody>
+          <a:bodyPr rtlCol="0" anchor="ctr"/>
+          <a:lstStyle/>
+          <a:p>
+            <a:pPr algn="ctr"/>
+            <a:endParaRPr lang="nl-NL">
+              <a:solidFill>
+                <a:schemeClr val="bg1"/>
+              </a:solidFill>
+            </a:endParaRPr>
+          </a:p>
+        </p:txBody>
+      </p:sp>
+      <p:cxnSp>
+        <p:nvCxnSpPr>
+          <p:cNvPr id="37" name="Rechte verbindingslijn 36">
+            <a:extLst>
+              <a:ext uri="{FF2B5EF4-FFF2-40B4-BE49-F238E27FC236}">
+                <a16:creationId xmlns:a16="http://schemas.microsoft.com/office/drawing/2014/main" id="{D1A58E7C-BCDB-C007-61F9-31C13BBFC105}"/>
+              </a:ext>
+            </a:extLst>
+          </p:cNvPr>
+          <p:cNvCxnSpPr>
+            <a:cxnSpLocks/>
+          </p:cNvCxnSpPr>
+          <p:nvPr/>
+        </p:nvCxnSpPr>
+        <p:spPr>
+          <a:xfrm>
+            <a:off x="3623938" y="3698437"/>
+            <a:ext cx="690665" cy="1389129"/>
+          </a:xfrm>
+          <a:prstGeom prst="line">
+            <a:avLst/>
+          </a:prstGeom>
+          <a:ln w="57150">
+            <a:solidFill>
+              <a:srgbClr val="FF0000"/>
+            </a:solidFill>
+          </a:ln>
+        </p:spPr>
+        <p:style>
+          <a:lnRef idx="2">
+            <a:schemeClr val="accent1"/>
+          </a:lnRef>
+          <a:fillRef idx="0">
+            <a:schemeClr val="accent1"/>
+          </a:fillRef>
+          <a:effectRef idx="1">
+            <a:schemeClr val="accent1"/>
+          </a:effectRef>
+          <a:fontRef idx="minor">
+            <a:schemeClr val="tx1"/>
+          </a:fontRef>
+        </p:style>
+      </p:cxnSp>
+      <p:cxnSp>
+        <p:nvCxnSpPr>
+          <p:cNvPr id="39" name="Rechte verbindingslijn 38">
+            <a:extLst>
+              <a:ext uri="{FF2B5EF4-FFF2-40B4-BE49-F238E27FC236}">
+                <a16:creationId xmlns:a16="http://schemas.microsoft.com/office/drawing/2014/main" id="{DE7CF1EF-2B50-5B95-DF6D-B97950193BF3}"/>
+              </a:ext>
+            </a:extLst>
+          </p:cNvPr>
+          <p:cNvCxnSpPr>
+            <a:cxnSpLocks/>
+          </p:cNvCxnSpPr>
+          <p:nvPr/>
+        </p:nvCxnSpPr>
+        <p:spPr>
+          <a:xfrm>
+            <a:off x="4286038" y="5087566"/>
+            <a:ext cx="2118622" cy="0"/>
+          </a:xfrm>
+          <a:prstGeom prst="line">
+            <a:avLst/>
+          </a:prstGeom>
+          <a:ln w="57150">
+            <a:solidFill>
+              <a:srgbClr val="FF0000"/>
+            </a:solidFill>
+          </a:ln>
+        </p:spPr>
+        <p:style>
+          <a:lnRef idx="2">
+            <a:schemeClr val="accent1"/>
+          </a:lnRef>
+          <a:fillRef idx="0">
+            <a:schemeClr val="accent1"/>
+          </a:fillRef>
+          <a:effectRef idx="1">
+            <a:schemeClr val="accent1"/>
+          </a:effectRef>
+          <a:fontRef idx="minor">
+            <a:schemeClr val="tx1"/>
+          </a:fontRef>
+        </p:style>
+      </p:cxnSp>
+      <p:sp>
+        <p:nvSpPr>
+          <p:cNvPr id="40" name="Ovaal 39">
+            <a:extLst>
+              <a:ext uri="{FF2B5EF4-FFF2-40B4-BE49-F238E27FC236}">
+                <a16:creationId xmlns:a16="http://schemas.microsoft.com/office/drawing/2014/main" id="{F5F302D7-2D21-E14A-E01E-1D2171B2E59F}"/>
+              </a:ext>
+            </a:extLst>
+          </p:cNvPr>
+          <p:cNvSpPr/>
+          <p:nvPr/>
+        </p:nvSpPr>
+        <p:spPr>
+          <a:xfrm>
+            <a:off x="6202774" y="4954268"/>
+            <a:ext cx="301558" cy="301558"/>
+          </a:xfrm>
+          <a:prstGeom prst="ellipse">
+            <a:avLst/>
+          </a:prstGeom>
+          <a:solidFill>
+            <a:schemeClr val="bg1"/>
+          </a:solidFill>
+        </p:spPr>
+        <p:style>
+          <a:lnRef idx="2">
+            <a:schemeClr val="accent1">
+              <a:shade val="15000"/>
+            </a:schemeClr>
+          </a:lnRef>
+          <a:fillRef idx="1">
+            <a:schemeClr val="accent1"/>
+          </a:fillRef>
+          <a:effectRef idx="0">
+            <a:schemeClr val="accent1"/>
+          </a:effectRef>
+          <a:fontRef idx="minor">
+            <a:schemeClr val="lt1"/>
+          </a:fontRef>
+        </p:style>
+        <p:txBody>
+          <a:bodyPr rtlCol="0" anchor="ctr"/>
+          <a:lstStyle/>
+          <a:p>
+            <a:pPr algn="ctr"/>
+            <a:endParaRPr lang="nl-NL">
+              <a:solidFill>
+                <a:schemeClr val="bg1"/>
+              </a:solidFill>
+            </a:endParaRPr>
+          </a:p>
+        </p:txBody>
+      </p:sp>
+      <p:sp>
+        <p:nvSpPr>
+          <p:cNvPr id="42" name="Ovaal 41">
+            <a:extLst>
+              <a:ext uri="{FF2B5EF4-FFF2-40B4-BE49-F238E27FC236}">
+                <a16:creationId xmlns:a16="http://schemas.microsoft.com/office/drawing/2014/main" id="{8BA4C85E-1608-B56D-8D0E-B2DF9CB686B6}"/>
+              </a:ext>
+            </a:extLst>
+          </p:cNvPr>
+          <p:cNvSpPr/>
+          <p:nvPr/>
+        </p:nvSpPr>
+        <p:spPr>
+          <a:xfrm>
+            <a:off x="7148211" y="6154333"/>
+            <a:ext cx="301558" cy="301558"/>
+          </a:xfrm>
+          <a:prstGeom prst="ellipse">
+            <a:avLst/>
+          </a:prstGeom>
+          <a:solidFill>
+            <a:schemeClr val="bg1"/>
+          </a:solidFill>
+        </p:spPr>
+        <p:style>
+          <a:lnRef idx="2">
+            <a:schemeClr val="accent1">
+              <a:shade val="15000"/>
+            </a:schemeClr>
+          </a:lnRef>
+          <a:fillRef idx="1">
+            <a:schemeClr val="accent1"/>
+          </a:fillRef>
+          <a:effectRef idx="0">
+            <a:schemeClr val="accent1"/>
+          </a:effectRef>
+          <a:fontRef idx="minor">
+            <a:schemeClr val="lt1"/>
+          </a:fontRef>
+        </p:style>
+        <p:txBody>
+          <a:bodyPr rtlCol="0" anchor="ctr"/>
+          <a:lstStyle/>
+          <a:p>
+            <a:pPr algn="ctr"/>
+            <a:endParaRPr lang="nl-NL">
+              <a:solidFill>
+                <a:schemeClr val="bg1"/>
+              </a:solidFill>
+            </a:endParaRPr>
+          </a:p>
+        </p:txBody>
+      </p:sp>
+      <p:cxnSp>
+        <p:nvCxnSpPr>
+          <p:cNvPr id="45" name="Rechte verbindingslijn 44">
+            <a:extLst>
+              <a:ext uri="{FF2B5EF4-FFF2-40B4-BE49-F238E27FC236}">
+                <a16:creationId xmlns:a16="http://schemas.microsoft.com/office/drawing/2014/main" id="{EB8DDD16-9A22-86E0-4965-BF2321D56AB7}"/>
+              </a:ext>
+            </a:extLst>
+          </p:cNvPr>
+          <p:cNvCxnSpPr>
+            <a:cxnSpLocks/>
+            <a:endCxn id="40" idx="7"/>
+          </p:cNvCxnSpPr>
+          <p:nvPr/>
+        </p:nvCxnSpPr>
+        <p:spPr>
+          <a:xfrm flipH="1">
+            <a:off x="6460170" y="3508747"/>
+            <a:ext cx="537262" cy="1489683"/>
+          </a:xfrm>
+          <a:prstGeom prst="line">
+            <a:avLst/>
+          </a:prstGeom>
+          <a:ln w="57150">
+            <a:solidFill>
+              <a:srgbClr val="FF0000"/>
+            </a:solidFill>
+          </a:ln>
+        </p:spPr>
+        <p:style>
+          <a:lnRef idx="2">
+            <a:schemeClr val="accent1"/>
+          </a:lnRef>
+          <a:fillRef idx="0">
+            <a:schemeClr val="accent1"/>
+          </a:fillRef>
+          <a:effectRef idx="1">
+            <a:schemeClr val="accent1"/>
+          </a:effectRef>
+          <a:fontRef idx="minor">
+            <a:schemeClr val="tx1"/>
+          </a:fontRef>
+        </p:style>
+      </p:cxnSp>
+      <p:cxnSp>
+        <p:nvCxnSpPr>
+          <p:cNvPr id="48" name="Rechte verbindingslijn 47">
+            <a:extLst>
+              <a:ext uri="{FF2B5EF4-FFF2-40B4-BE49-F238E27FC236}">
+                <a16:creationId xmlns:a16="http://schemas.microsoft.com/office/drawing/2014/main" id="{13377343-16DA-7745-C6E4-7957FFA1E469}"/>
+              </a:ext>
+            </a:extLst>
+          </p:cNvPr>
+          <p:cNvCxnSpPr>
+            <a:cxnSpLocks/>
+          </p:cNvCxnSpPr>
+          <p:nvPr/>
+        </p:nvCxnSpPr>
+        <p:spPr>
+          <a:xfrm flipH="1">
+            <a:off x="7081350" y="3508747"/>
+            <a:ext cx="895331" cy="2045554"/>
+          </a:xfrm>
+          <a:prstGeom prst="line">
+            <a:avLst/>
+          </a:prstGeom>
+          <a:ln w="57150">
+            <a:solidFill>
+              <a:srgbClr val="FFC000"/>
+            </a:solidFill>
+          </a:ln>
+        </p:spPr>
+        <p:style>
+          <a:lnRef idx="2">
+            <a:schemeClr val="accent1"/>
+          </a:lnRef>
+          <a:fillRef idx="0">
+            <a:schemeClr val="accent1"/>
+          </a:fillRef>
+          <a:effectRef idx="1">
+            <a:schemeClr val="accent1"/>
+          </a:effectRef>
+          <a:fontRef idx="minor">
+            <a:schemeClr val="tx1"/>
+          </a:fontRef>
+        </p:style>
+      </p:cxnSp>
+      <p:cxnSp>
+        <p:nvCxnSpPr>
+          <p:cNvPr id="50" name="Rechte verbindingslijn 49">
+            <a:extLst>
+              <a:ext uri="{FF2B5EF4-FFF2-40B4-BE49-F238E27FC236}">
+                <a16:creationId xmlns:a16="http://schemas.microsoft.com/office/drawing/2014/main" id="{9FB66344-968E-89B7-9EEE-539C234C0AC3}"/>
+              </a:ext>
+            </a:extLst>
+          </p:cNvPr>
+          <p:cNvCxnSpPr>
+            <a:cxnSpLocks/>
+          </p:cNvCxnSpPr>
+          <p:nvPr/>
+        </p:nvCxnSpPr>
+        <p:spPr>
+          <a:xfrm flipH="1">
+            <a:off x="7351335" y="3531537"/>
+            <a:ext cx="1212251" cy="2648078"/>
+          </a:xfrm>
+          <a:prstGeom prst="line">
+            <a:avLst/>
+          </a:prstGeom>
+          <a:ln w="57150">
+            <a:solidFill>
+              <a:srgbClr val="00B0F0"/>
+            </a:solidFill>
+          </a:ln>
+        </p:spPr>
+        <p:style>
+          <a:lnRef idx="2">
+            <a:schemeClr val="accent1"/>
+          </a:lnRef>
+          <a:fillRef idx="0">
+            <a:schemeClr val="accent1"/>
+          </a:fillRef>
+          <a:effectRef idx="1">
+            <a:schemeClr val="accent1"/>
+          </a:effectRef>
+          <a:fontRef idx="minor">
+            <a:schemeClr val="tx1"/>
+          </a:fontRef>
+        </p:style>
+      </p:cxnSp>
+      <p:cxnSp>
+        <p:nvCxnSpPr>
+          <p:cNvPr id="52" name="Rechte verbindingslijn 51">
+            <a:extLst>
+              <a:ext uri="{FF2B5EF4-FFF2-40B4-BE49-F238E27FC236}">
+                <a16:creationId xmlns:a16="http://schemas.microsoft.com/office/drawing/2014/main" id="{E5CE9898-BF41-1CA4-59D0-B5715816EED5}"/>
+              </a:ext>
+            </a:extLst>
+          </p:cNvPr>
+          <p:cNvCxnSpPr>
+            <a:cxnSpLocks/>
+          </p:cNvCxnSpPr>
+          <p:nvPr/>
+        </p:nvCxnSpPr>
+        <p:spPr>
+          <a:xfrm flipH="1">
+            <a:off x="11405259" y="2684157"/>
+            <a:ext cx="402308" cy="834993"/>
+          </a:xfrm>
+          <a:prstGeom prst="line">
+            <a:avLst/>
+          </a:prstGeom>
+          <a:ln w="57150"/>
+        </p:spPr>
+        <p:style>
+          <a:lnRef idx="2">
+            <a:schemeClr val="accent1"/>
+          </a:lnRef>
+          <a:fillRef idx="0">
+            <a:schemeClr val="accent1"/>
+          </a:fillRef>
+          <a:effectRef idx="1">
+            <a:schemeClr val="accent1"/>
+          </a:effectRef>
+          <a:fontRef idx="minor">
+            <a:schemeClr val="tx1"/>
+          </a:fontRef>
+        </p:style>
+      </p:cxnSp>
+      <p:sp>
+        <p:nvSpPr>
+          <p:cNvPr id="55" name="Ovaal 54">
+            <a:extLst>
+              <a:ext uri="{FF2B5EF4-FFF2-40B4-BE49-F238E27FC236}">
+                <a16:creationId xmlns:a16="http://schemas.microsoft.com/office/drawing/2014/main" id="{1F9450CA-F0B0-A271-AD59-F325D456D025}"/>
+              </a:ext>
+            </a:extLst>
+          </p:cNvPr>
+          <p:cNvSpPr/>
+          <p:nvPr/>
+        </p:nvSpPr>
+        <p:spPr>
+          <a:xfrm>
+            <a:off x="6819325" y="3375449"/>
+            <a:ext cx="301558" cy="301558"/>
+          </a:xfrm>
+          <a:prstGeom prst="ellipse">
+            <a:avLst/>
+          </a:prstGeom>
+          <a:solidFill>
+            <a:schemeClr val="bg1"/>
+          </a:solidFill>
+        </p:spPr>
+        <p:style>
+          <a:lnRef idx="2">
+            <a:schemeClr val="accent1">
+              <a:shade val="15000"/>
+            </a:schemeClr>
+          </a:lnRef>
+          <a:fillRef idx="1">
+            <a:schemeClr val="accent1"/>
+          </a:fillRef>
+          <a:effectRef idx="0">
+            <a:schemeClr val="accent1"/>
+          </a:effectRef>
+          <a:fontRef idx="minor">
+            <a:schemeClr val="lt1"/>
+          </a:fontRef>
+        </p:style>
+        <p:txBody>
+          <a:bodyPr rtlCol="0" anchor="ctr"/>
+          <a:lstStyle/>
+          <a:p>
+            <a:pPr algn="ctr"/>
+            <a:endParaRPr lang="nl-NL">
+              <a:solidFill>
+                <a:schemeClr val="bg1"/>
+              </a:solidFill>
+            </a:endParaRPr>
+          </a:p>
+        </p:txBody>
+      </p:sp>
+      <p:sp>
+        <p:nvSpPr>
+          <p:cNvPr id="56" name="Ovaal 55">
+            <a:extLst>
+              <a:ext uri="{FF2B5EF4-FFF2-40B4-BE49-F238E27FC236}">
+                <a16:creationId xmlns:a16="http://schemas.microsoft.com/office/drawing/2014/main" id="{46CD3781-3108-CB8A-275B-B5E879220A79}"/>
+              </a:ext>
+            </a:extLst>
+          </p:cNvPr>
+          <p:cNvSpPr/>
+          <p:nvPr/>
+        </p:nvSpPr>
+        <p:spPr>
+          <a:xfrm>
+            <a:off x="7817796" y="3357967"/>
+            <a:ext cx="301558" cy="301558"/>
+          </a:xfrm>
+          <a:prstGeom prst="ellipse">
+            <a:avLst/>
+          </a:prstGeom>
+          <a:solidFill>
+            <a:schemeClr val="bg1"/>
+          </a:solidFill>
+        </p:spPr>
+        <p:style>
+          <a:lnRef idx="2">
+            <a:schemeClr val="accent1">
+              <a:shade val="15000"/>
+            </a:schemeClr>
+          </a:lnRef>
+          <a:fillRef idx="1">
+            <a:schemeClr val="accent1"/>
+          </a:fillRef>
+          <a:effectRef idx="0">
+            <a:schemeClr val="accent1"/>
+          </a:effectRef>
+          <a:fontRef idx="minor">
+            <a:schemeClr val="lt1"/>
+          </a:fontRef>
+        </p:style>
+        <p:txBody>
+          <a:bodyPr rtlCol="0" anchor="ctr"/>
+          <a:lstStyle/>
+          <a:p>
+            <a:pPr algn="ctr"/>
+            <a:endParaRPr lang="nl-NL">
+              <a:solidFill>
+                <a:schemeClr val="bg1"/>
+              </a:solidFill>
+            </a:endParaRPr>
+          </a:p>
+        </p:txBody>
+      </p:sp>
+      <p:sp>
+        <p:nvSpPr>
+          <p:cNvPr id="57" name="Ovaal 56">
+            <a:extLst>
+              <a:ext uri="{FF2B5EF4-FFF2-40B4-BE49-F238E27FC236}">
+                <a16:creationId xmlns:a16="http://schemas.microsoft.com/office/drawing/2014/main" id="{E5AF3187-DE14-8212-7C6A-EDD99AF70AC3}"/>
+              </a:ext>
+            </a:extLst>
+          </p:cNvPr>
+          <p:cNvSpPr/>
+          <p:nvPr/>
+        </p:nvSpPr>
+        <p:spPr>
+          <a:xfrm>
+            <a:off x="8393585" y="3343071"/>
+            <a:ext cx="301558" cy="301558"/>
+          </a:xfrm>
+          <a:prstGeom prst="ellipse">
+            <a:avLst/>
+          </a:prstGeom>
+          <a:solidFill>
+            <a:schemeClr val="bg1"/>
+          </a:solidFill>
+        </p:spPr>
+        <p:style>
+          <a:lnRef idx="2">
+            <a:schemeClr val="accent1">
+              <a:shade val="15000"/>
+            </a:schemeClr>
+          </a:lnRef>
+          <a:fillRef idx="1">
+            <a:schemeClr val="accent1"/>
+          </a:fillRef>
+          <a:effectRef idx="0">
+            <a:schemeClr val="accent1"/>
+          </a:effectRef>
+          <a:fontRef idx="minor">
+            <a:schemeClr val="lt1"/>
+          </a:fontRef>
+        </p:style>
+        <p:txBody>
+          <a:bodyPr rtlCol="0" anchor="ctr"/>
+          <a:lstStyle/>
+          <a:p>
+            <a:pPr algn="ctr"/>
+            <a:endParaRPr lang="nl-NL">
+              <a:solidFill>
+                <a:schemeClr val="bg1"/>
+              </a:solidFill>
+            </a:endParaRPr>
+          </a:p>
+        </p:txBody>
+      </p:sp>
+      <p:sp>
+        <p:nvSpPr>
+          <p:cNvPr id="59" name="Tekstvak 58">
+            <a:extLst>
+              <a:ext uri="{FF2B5EF4-FFF2-40B4-BE49-F238E27FC236}">
+                <a16:creationId xmlns:a16="http://schemas.microsoft.com/office/drawing/2014/main" id="{5F64B336-825A-E8A8-EDFF-875AA5E717B6}"/>
+              </a:ext>
+            </a:extLst>
+          </p:cNvPr>
+          <p:cNvSpPr txBox="1"/>
+          <p:nvPr/>
+        </p:nvSpPr>
+        <p:spPr>
+          <a:xfrm>
+            <a:off x="4353302" y="4718234"/>
+            <a:ext cx="1323376" cy="369332"/>
+          </a:xfrm>
+          <a:prstGeom prst="rect">
+            <a:avLst/>
+          </a:prstGeom>
+          <a:noFill/>
+        </p:spPr>
+        <p:txBody>
+          <a:bodyPr wrap="none" rtlCol="0">
+            <a:spAutoFit/>
+          </a:bodyPr>
+          <a:lstStyle/>
+          <a:p>
+            <a:r>
+              <a:rPr lang="en-US" dirty="0"/>
+              <a:t>feature/nav</a:t>
+            </a:r>
+            <a:endParaRPr lang="nl-NL" dirty="0"/>
+          </a:p>
+        </p:txBody>
+      </p:sp>
+      <p:sp>
+        <p:nvSpPr>
+          <p:cNvPr id="60" name="Tekstvak 59">
+            <a:extLst>
+              <a:ext uri="{FF2B5EF4-FFF2-40B4-BE49-F238E27FC236}">
+                <a16:creationId xmlns:a16="http://schemas.microsoft.com/office/drawing/2014/main" id="{D5A3604F-D41A-1BAE-ABBA-60E3527880EE}"/>
+              </a:ext>
+            </a:extLst>
+          </p:cNvPr>
+          <p:cNvSpPr txBox="1"/>
+          <p:nvPr/>
+        </p:nvSpPr>
+        <p:spPr>
+          <a:xfrm>
+            <a:off x="3554975" y="5347653"/>
+            <a:ext cx="1672124" cy="369332"/>
+          </a:xfrm>
+          <a:prstGeom prst="rect">
+            <a:avLst/>
+          </a:prstGeom>
+          <a:noFill/>
+        </p:spPr>
+        <p:txBody>
+          <a:bodyPr wrap="none" rtlCol="0">
+            <a:spAutoFit/>
+          </a:bodyPr>
+          <a:lstStyle/>
+          <a:p>
+            <a:r>
+              <a:rPr lang="en-US" dirty="0"/>
+              <a:t>feature/header</a:t>
+            </a:r>
+            <a:endParaRPr lang="nl-NL" dirty="0"/>
+          </a:p>
+        </p:txBody>
+      </p:sp>
+      <p:sp>
+        <p:nvSpPr>
+          <p:cNvPr id="61" name="Tekstvak 60">
+            <a:extLst>
+              <a:ext uri="{FF2B5EF4-FFF2-40B4-BE49-F238E27FC236}">
+                <a16:creationId xmlns:a16="http://schemas.microsoft.com/office/drawing/2014/main" id="{759C4869-0F65-C4D1-25B9-9FD3195C6163}"/>
+              </a:ext>
+            </a:extLst>
+          </p:cNvPr>
+          <p:cNvSpPr txBox="1"/>
+          <p:nvPr/>
+        </p:nvSpPr>
+        <p:spPr>
+          <a:xfrm>
+            <a:off x="3276987" y="5961458"/>
+            <a:ext cx="1730858" cy="369332"/>
+          </a:xfrm>
+          <a:prstGeom prst="rect">
+            <a:avLst/>
+          </a:prstGeom>
+          <a:noFill/>
+        </p:spPr>
+        <p:txBody>
+          <a:bodyPr wrap="none" rtlCol="0">
+            <a:spAutoFit/>
+          </a:bodyPr>
+          <a:lstStyle/>
+          <a:p>
+            <a:r>
+              <a:rPr lang="en-US" dirty="0"/>
+              <a:t>feature/content</a:t>
+            </a:r>
+            <a:endParaRPr lang="nl-NL" dirty="0"/>
+          </a:p>
+        </p:txBody>
+      </p:sp>
+      <p:cxnSp>
+        <p:nvCxnSpPr>
+          <p:cNvPr id="64" name="Rechte verbindingslijn 63">
+            <a:extLst>
+              <a:ext uri="{FF2B5EF4-FFF2-40B4-BE49-F238E27FC236}">
+                <a16:creationId xmlns:a16="http://schemas.microsoft.com/office/drawing/2014/main" id="{462349E5-7D8E-62F8-8E90-778811E0A690}"/>
+              </a:ext>
+            </a:extLst>
+          </p:cNvPr>
+          <p:cNvCxnSpPr>
+            <a:cxnSpLocks/>
+          </p:cNvCxnSpPr>
+          <p:nvPr/>
+        </p:nvCxnSpPr>
+        <p:spPr>
+          <a:xfrm>
+            <a:off x="9147488" y="3534535"/>
+            <a:ext cx="419631" cy="696972"/>
+          </a:xfrm>
+          <a:prstGeom prst="line">
+            <a:avLst/>
+          </a:prstGeom>
+          <a:ln w="57150">
+            <a:solidFill>
+              <a:srgbClr val="FF0000"/>
+            </a:solidFill>
+          </a:ln>
+        </p:spPr>
+        <p:style>
+          <a:lnRef idx="2">
+            <a:schemeClr val="accent1"/>
+          </a:lnRef>
+          <a:fillRef idx="0">
+            <a:schemeClr val="accent1"/>
+          </a:fillRef>
+          <a:effectRef idx="1">
+            <a:schemeClr val="accent1"/>
+          </a:effectRef>
+          <a:fontRef idx="minor">
+            <a:schemeClr val="tx1"/>
+          </a:fontRef>
+        </p:style>
+      </p:cxnSp>
+      <p:cxnSp>
+        <p:nvCxnSpPr>
+          <p:cNvPr id="65" name="Rechte verbindingslijn 64">
+            <a:extLst>
+              <a:ext uri="{FF2B5EF4-FFF2-40B4-BE49-F238E27FC236}">
+                <a16:creationId xmlns:a16="http://schemas.microsoft.com/office/drawing/2014/main" id="{3B059008-C8EC-06AB-5BC6-54DD85C2433F}"/>
+              </a:ext>
+            </a:extLst>
+          </p:cNvPr>
+          <p:cNvCxnSpPr>
+            <a:cxnSpLocks/>
+          </p:cNvCxnSpPr>
+          <p:nvPr/>
+        </p:nvCxnSpPr>
+        <p:spPr>
+          <a:xfrm>
+            <a:off x="9532606" y="4210883"/>
+            <a:ext cx="1005685" cy="0"/>
+          </a:xfrm>
+          <a:prstGeom prst="line">
+            <a:avLst/>
+          </a:prstGeom>
+          <a:ln w="57150">
+            <a:solidFill>
+              <a:srgbClr val="FF0000"/>
+            </a:solidFill>
+          </a:ln>
+        </p:spPr>
+        <p:style>
+          <a:lnRef idx="2">
+            <a:schemeClr val="accent1"/>
+          </a:lnRef>
+          <a:fillRef idx="0">
+            <a:schemeClr val="accent1"/>
+          </a:fillRef>
+          <a:effectRef idx="1">
+            <a:schemeClr val="accent1"/>
+          </a:effectRef>
+          <a:fontRef idx="minor">
+            <a:schemeClr val="tx1"/>
+          </a:fontRef>
+        </p:style>
+      </p:cxnSp>
+      <p:cxnSp>
+        <p:nvCxnSpPr>
+          <p:cNvPr id="66" name="Rechte verbindingslijn 65">
+            <a:extLst>
+              <a:ext uri="{FF2B5EF4-FFF2-40B4-BE49-F238E27FC236}">
+                <a16:creationId xmlns:a16="http://schemas.microsoft.com/office/drawing/2014/main" id="{0D38D266-0AE2-0DEA-E29C-2035590C70DD}"/>
+              </a:ext>
+            </a:extLst>
+          </p:cNvPr>
+          <p:cNvCxnSpPr>
+            <a:cxnSpLocks/>
+          </p:cNvCxnSpPr>
+          <p:nvPr/>
+        </p:nvCxnSpPr>
+        <p:spPr>
+          <a:xfrm flipH="1">
+            <a:off x="10536139" y="3503931"/>
+            <a:ext cx="420944" cy="706952"/>
+          </a:xfrm>
+          <a:prstGeom prst="line">
+            <a:avLst/>
+          </a:prstGeom>
+          <a:ln w="57150">
+            <a:solidFill>
+              <a:srgbClr val="FF0000"/>
+            </a:solidFill>
+          </a:ln>
+        </p:spPr>
+        <p:style>
+          <a:lnRef idx="2">
+            <a:schemeClr val="accent1"/>
+          </a:lnRef>
+          <a:fillRef idx="0">
+            <a:schemeClr val="accent1"/>
+          </a:fillRef>
+          <a:effectRef idx="1">
+            <a:schemeClr val="accent1"/>
+          </a:effectRef>
+          <a:fontRef idx="minor">
+            <a:schemeClr val="tx1"/>
+          </a:fontRef>
+        </p:style>
+      </p:cxnSp>
+      <p:sp>
+        <p:nvSpPr>
+          <p:cNvPr id="67" name="Tekstvak 66">
+            <a:extLst>
+              <a:ext uri="{FF2B5EF4-FFF2-40B4-BE49-F238E27FC236}">
+                <a16:creationId xmlns:a16="http://schemas.microsoft.com/office/drawing/2014/main" id="{A8C375E8-A781-95B8-F8BF-302EA9F4A96C}"/>
+              </a:ext>
+            </a:extLst>
+          </p:cNvPr>
+          <p:cNvSpPr txBox="1"/>
+          <p:nvPr/>
+        </p:nvSpPr>
+        <p:spPr>
+          <a:xfrm>
+            <a:off x="9532606" y="4257294"/>
+            <a:ext cx="1188146" cy="369332"/>
+          </a:xfrm>
+          <a:prstGeom prst="rect">
+            <a:avLst/>
+          </a:prstGeom>
+          <a:noFill/>
+        </p:spPr>
+        <p:txBody>
+          <a:bodyPr wrap="none" rtlCol="0">
+            <a:spAutoFit/>
+          </a:bodyPr>
+          <a:lstStyle/>
+          <a:p>
+            <a:r>
+              <a:rPr lang="en-US" dirty="0"/>
+              <a:t>hotfix/bug</a:t>
+            </a:r>
+            <a:endParaRPr lang="nl-NL" dirty="0"/>
+          </a:p>
+        </p:txBody>
+      </p:sp>
+      <p:sp>
+        <p:nvSpPr>
+          <p:cNvPr id="58" name="Ovaal 57">
+            <a:extLst>
+              <a:ext uri="{FF2B5EF4-FFF2-40B4-BE49-F238E27FC236}">
+                <a16:creationId xmlns:a16="http://schemas.microsoft.com/office/drawing/2014/main" id="{491CB2BC-3021-E6B6-2C37-9665CD86D29B}"/>
+              </a:ext>
+            </a:extLst>
+          </p:cNvPr>
+          <p:cNvSpPr/>
+          <p:nvPr/>
+        </p:nvSpPr>
+        <p:spPr>
+          <a:xfrm>
+            <a:off x="8995228" y="3377374"/>
+            <a:ext cx="301558" cy="301558"/>
+          </a:xfrm>
+          <a:prstGeom prst="ellipse">
+            <a:avLst/>
+          </a:prstGeom>
+          <a:solidFill>
+            <a:schemeClr val="bg1"/>
+          </a:solidFill>
+        </p:spPr>
+        <p:style>
+          <a:lnRef idx="2">
+            <a:schemeClr val="accent1">
+              <a:shade val="15000"/>
+            </a:schemeClr>
+          </a:lnRef>
+          <a:fillRef idx="1">
+            <a:schemeClr val="accent1"/>
+          </a:fillRef>
+          <a:effectRef idx="0">
+            <a:schemeClr val="accent1"/>
+          </a:effectRef>
+          <a:fontRef idx="minor">
+            <a:schemeClr val="lt1"/>
+          </a:fontRef>
+        </p:style>
+        <p:txBody>
+          <a:bodyPr rtlCol="0" anchor="ctr"/>
+          <a:lstStyle/>
+          <a:p>
+            <a:pPr algn="ctr"/>
+            <a:endParaRPr lang="nl-NL">
+              <a:solidFill>
+                <a:schemeClr val="bg1"/>
+              </a:solidFill>
+            </a:endParaRPr>
+          </a:p>
+        </p:txBody>
+      </p:sp>
+      <p:sp>
+        <p:nvSpPr>
+          <p:cNvPr id="72" name="Ovaal 71">
+            <a:extLst>
+              <a:ext uri="{FF2B5EF4-FFF2-40B4-BE49-F238E27FC236}">
+                <a16:creationId xmlns:a16="http://schemas.microsoft.com/office/drawing/2014/main" id="{760398D4-B4CE-A80A-3537-DF2358B40222}"/>
+              </a:ext>
+            </a:extLst>
+          </p:cNvPr>
+          <p:cNvSpPr/>
+          <p:nvPr/>
+        </p:nvSpPr>
+        <p:spPr>
+          <a:xfrm>
+            <a:off x="11685700" y="2543783"/>
+            <a:ext cx="301558" cy="301558"/>
+          </a:xfrm>
+          <a:prstGeom prst="ellipse">
+            <a:avLst/>
+          </a:prstGeom>
+          <a:solidFill>
+            <a:schemeClr val="bg1"/>
+          </a:solidFill>
+        </p:spPr>
+        <p:style>
+          <a:lnRef idx="2">
+            <a:schemeClr val="accent1">
+              <a:shade val="15000"/>
+            </a:schemeClr>
+          </a:lnRef>
+          <a:fillRef idx="1">
+            <a:schemeClr val="accent1"/>
+          </a:fillRef>
+          <a:effectRef idx="0">
+            <a:schemeClr val="accent1"/>
+          </a:effectRef>
+          <a:fontRef idx="minor">
+            <a:schemeClr val="lt1"/>
+          </a:fontRef>
+        </p:style>
+        <p:txBody>
+          <a:bodyPr rtlCol="0" anchor="ctr"/>
+          <a:lstStyle/>
+          <a:p>
+            <a:pPr algn="ctr"/>
+            <a:endParaRPr lang="nl-NL">
+              <a:solidFill>
+                <a:schemeClr val="bg1"/>
+              </a:solidFill>
+            </a:endParaRPr>
+          </a:p>
+        </p:txBody>
+      </p:sp>
+      <p:sp>
+        <p:nvSpPr>
+          <p:cNvPr id="73" name="Tekstvak 72">
+            <a:extLst>
+              <a:ext uri="{FF2B5EF4-FFF2-40B4-BE49-F238E27FC236}">
+                <a16:creationId xmlns:a16="http://schemas.microsoft.com/office/drawing/2014/main" id="{7EB31832-9661-66A0-4F0D-2266EDAEA4FB}"/>
+              </a:ext>
+            </a:extLst>
+          </p:cNvPr>
+          <p:cNvSpPr txBox="1"/>
+          <p:nvPr/>
+        </p:nvSpPr>
+        <p:spPr>
+          <a:xfrm rot="3660498">
+            <a:off x="10932664" y="1841959"/>
+            <a:ext cx="1238609" cy="369332"/>
+          </a:xfrm>
+          <a:prstGeom prst="rect">
+            <a:avLst/>
+          </a:prstGeom>
+          <a:noFill/>
+        </p:spPr>
+        <p:txBody>
+          <a:bodyPr wrap="none" rtlCol="0">
+            <a:spAutoFit/>
+          </a:bodyPr>
+          <a:lstStyle/>
+          <a:p>
+            <a:r>
+              <a:rPr lang="en-US" dirty="0"/>
+              <a:t>version1.0</a:t>
+            </a:r>
+            <a:endParaRPr lang="nl-NL" dirty="0"/>
+          </a:p>
+        </p:txBody>
+      </p:sp>
+      <p:sp>
+        <p:nvSpPr>
+          <p:cNvPr id="74" name="Ovaal 73">
+            <a:extLst>
+              <a:ext uri="{FF2B5EF4-FFF2-40B4-BE49-F238E27FC236}">
+                <a16:creationId xmlns:a16="http://schemas.microsoft.com/office/drawing/2014/main" id="{5B207565-169B-22D8-EAF8-0CD27B456683}"/>
+              </a:ext>
+            </a:extLst>
+          </p:cNvPr>
+          <p:cNvSpPr/>
+          <p:nvPr/>
+        </p:nvSpPr>
+        <p:spPr>
+          <a:xfrm>
+            <a:off x="10763856" y="3359893"/>
+            <a:ext cx="301558" cy="301558"/>
+          </a:xfrm>
+          <a:prstGeom prst="ellipse">
+            <a:avLst/>
+          </a:prstGeom>
+          <a:solidFill>
+            <a:schemeClr val="bg1"/>
+          </a:solidFill>
+        </p:spPr>
+        <p:style>
+          <a:lnRef idx="2">
+            <a:schemeClr val="accent1">
+              <a:shade val="15000"/>
+            </a:schemeClr>
+          </a:lnRef>
+          <a:fillRef idx="1">
+            <a:schemeClr val="accent1"/>
+          </a:fillRef>
+          <a:effectRef idx="0">
+            <a:schemeClr val="accent1"/>
+          </a:effectRef>
+          <a:fontRef idx="minor">
+            <a:schemeClr val="lt1"/>
+          </a:fontRef>
+        </p:style>
+        <p:txBody>
+          <a:bodyPr rtlCol="0" anchor="ctr"/>
+          <a:lstStyle/>
+          <a:p>
+            <a:pPr algn="ctr"/>
+            <a:endParaRPr lang="nl-NL">
+              <a:solidFill>
+                <a:schemeClr val="bg1"/>
+              </a:solidFill>
+            </a:endParaRPr>
+          </a:p>
+        </p:txBody>
+      </p:sp>
+      <p:sp>
+        <p:nvSpPr>
+          <p:cNvPr id="75" name="Ovaal 74">
+            <a:extLst>
+              <a:ext uri="{FF2B5EF4-FFF2-40B4-BE49-F238E27FC236}">
+                <a16:creationId xmlns:a16="http://schemas.microsoft.com/office/drawing/2014/main" id="{B0ACDC8B-C8E1-D65E-A882-53D88AB9807C}"/>
+              </a:ext>
+            </a:extLst>
+          </p:cNvPr>
+          <p:cNvSpPr/>
+          <p:nvPr/>
+        </p:nvSpPr>
+        <p:spPr>
+          <a:xfrm>
+            <a:off x="5696685" y="4954268"/>
+            <a:ext cx="301558" cy="301558"/>
+          </a:xfrm>
+          <a:prstGeom prst="ellipse">
+            <a:avLst/>
+          </a:prstGeom>
+          <a:solidFill>
+            <a:schemeClr val="bg1"/>
+          </a:solidFill>
+        </p:spPr>
+        <p:style>
+          <a:lnRef idx="2">
+            <a:schemeClr val="accent1">
+              <a:shade val="15000"/>
+            </a:schemeClr>
+          </a:lnRef>
+          <a:fillRef idx="1">
+            <a:schemeClr val="accent1"/>
+          </a:fillRef>
+          <a:effectRef idx="0">
+            <a:schemeClr val="accent1"/>
+          </a:effectRef>
+          <a:fontRef idx="minor">
+            <a:schemeClr val="lt1"/>
+          </a:fontRef>
+        </p:style>
+        <p:txBody>
+          <a:bodyPr rtlCol="0" anchor="ctr"/>
+          <a:lstStyle/>
+          <a:p>
+            <a:pPr algn="ctr"/>
+            <a:endParaRPr lang="nl-NL">
+              <a:solidFill>
+                <a:schemeClr val="bg1"/>
+              </a:solidFill>
+            </a:endParaRPr>
+          </a:p>
+        </p:txBody>
+      </p:sp>
+      <p:sp>
+        <p:nvSpPr>
+          <p:cNvPr id="76" name="Ovaal 75">
+            <a:extLst>
+              <a:ext uri="{FF2B5EF4-FFF2-40B4-BE49-F238E27FC236}">
+                <a16:creationId xmlns:a16="http://schemas.microsoft.com/office/drawing/2014/main" id="{E3293F4D-7941-ABEF-41FE-910784323A50}"/>
+              </a:ext>
+            </a:extLst>
+          </p:cNvPr>
+          <p:cNvSpPr/>
+          <p:nvPr/>
+        </p:nvSpPr>
+        <p:spPr>
+          <a:xfrm>
+            <a:off x="5354308" y="5512601"/>
+            <a:ext cx="301558" cy="301558"/>
+          </a:xfrm>
+          <a:prstGeom prst="ellipse">
+            <a:avLst/>
+          </a:prstGeom>
+          <a:solidFill>
+            <a:schemeClr val="bg1"/>
+          </a:solidFill>
+        </p:spPr>
+        <p:style>
+          <a:lnRef idx="2">
+            <a:schemeClr val="accent1">
+              <a:shade val="15000"/>
+            </a:schemeClr>
+          </a:lnRef>
+          <a:fillRef idx="1">
+            <a:schemeClr val="accent1"/>
+          </a:fillRef>
+          <a:effectRef idx="0">
+            <a:schemeClr val="accent1"/>
+          </a:effectRef>
+          <a:fontRef idx="minor">
+            <a:schemeClr val="lt1"/>
+          </a:fontRef>
+        </p:style>
+        <p:txBody>
+          <a:bodyPr rtlCol="0" anchor="ctr"/>
+          <a:lstStyle/>
+          <a:p>
+            <a:pPr algn="ctr"/>
+            <a:endParaRPr lang="nl-NL">
+              <a:solidFill>
+                <a:schemeClr val="bg1"/>
+              </a:solidFill>
+            </a:endParaRPr>
+          </a:p>
+        </p:txBody>
+      </p:sp>
+      <p:sp>
+        <p:nvSpPr>
+          <p:cNvPr id="77" name="Ovaal 76">
+            <a:extLst>
+              <a:ext uri="{FF2B5EF4-FFF2-40B4-BE49-F238E27FC236}">
+                <a16:creationId xmlns:a16="http://schemas.microsoft.com/office/drawing/2014/main" id="{67081677-0988-45AA-1820-84F578FBE8C4}"/>
+              </a:ext>
+            </a:extLst>
+          </p:cNvPr>
+          <p:cNvSpPr/>
+          <p:nvPr/>
+        </p:nvSpPr>
+        <p:spPr>
+          <a:xfrm>
+            <a:off x="6162479" y="5550593"/>
+            <a:ext cx="301558" cy="301558"/>
+          </a:xfrm>
+          <a:prstGeom prst="ellipse">
+            <a:avLst/>
+          </a:prstGeom>
+          <a:solidFill>
+            <a:schemeClr val="bg1"/>
+          </a:solidFill>
+        </p:spPr>
+        <p:style>
+          <a:lnRef idx="2">
+            <a:schemeClr val="accent1">
+              <a:shade val="15000"/>
+            </a:schemeClr>
+          </a:lnRef>
+          <a:fillRef idx="1">
+            <a:schemeClr val="accent1"/>
+          </a:fillRef>
+          <a:effectRef idx="0">
+            <a:schemeClr val="accent1"/>
+          </a:effectRef>
+          <a:fontRef idx="minor">
+            <a:schemeClr val="lt1"/>
+          </a:fontRef>
+        </p:style>
+        <p:txBody>
+          <a:bodyPr rtlCol="0" anchor="ctr"/>
+          <a:lstStyle/>
+          <a:p>
+            <a:pPr algn="ctr"/>
+            <a:endParaRPr lang="nl-NL">
+              <a:solidFill>
+                <a:schemeClr val="bg1"/>
+              </a:solidFill>
+            </a:endParaRPr>
+          </a:p>
+        </p:txBody>
+      </p:sp>
+      <p:sp>
+        <p:nvSpPr>
+          <p:cNvPr id="78" name="Ovaal 77">
+            <a:extLst>
+              <a:ext uri="{FF2B5EF4-FFF2-40B4-BE49-F238E27FC236}">
+                <a16:creationId xmlns:a16="http://schemas.microsoft.com/office/drawing/2014/main" id="{3CAE2A9B-F174-5791-F004-96ED5DF3AD7C}"/>
+              </a:ext>
+            </a:extLst>
+          </p:cNvPr>
+          <p:cNvSpPr/>
+          <p:nvPr/>
+        </p:nvSpPr>
+        <p:spPr>
+          <a:xfrm>
+            <a:off x="5112416" y="6191317"/>
+            <a:ext cx="301558" cy="301558"/>
+          </a:xfrm>
+          <a:prstGeom prst="ellipse">
+            <a:avLst/>
+          </a:prstGeom>
+          <a:solidFill>
+            <a:schemeClr val="bg1"/>
+          </a:solidFill>
+        </p:spPr>
+        <p:style>
+          <a:lnRef idx="2">
+            <a:schemeClr val="accent1">
+              <a:shade val="15000"/>
+            </a:schemeClr>
+          </a:lnRef>
+          <a:fillRef idx="1">
+            <a:schemeClr val="accent1"/>
+          </a:fillRef>
+          <a:effectRef idx="0">
+            <a:schemeClr val="accent1"/>
+          </a:effectRef>
+          <a:fontRef idx="minor">
+            <a:schemeClr val="lt1"/>
+          </a:fontRef>
+        </p:style>
+        <p:txBody>
+          <a:bodyPr rtlCol="0" anchor="ctr"/>
+          <a:lstStyle/>
+          <a:p>
+            <a:pPr algn="ctr"/>
+            <a:endParaRPr lang="nl-NL">
+              <a:solidFill>
+                <a:schemeClr val="bg1"/>
+              </a:solidFill>
+            </a:endParaRPr>
+          </a:p>
+        </p:txBody>
+      </p:sp>
+      <p:sp>
+        <p:nvSpPr>
+          <p:cNvPr id="79" name="Ovaal 78">
+            <a:extLst>
+              <a:ext uri="{FF2B5EF4-FFF2-40B4-BE49-F238E27FC236}">
+                <a16:creationId xmlns:a16="http://schemas.microsoft.com/office/drawing/2014/main" id="{767849A2-9B90-561A-3A4B-BF2B73A5C492}"/>
+              </a:ext>
+            </a:extLst>
+          </p:cNvPr>
+          <p:cNvSpPr/>
+          <p:nvPr/>
+        </p:nvSpPr>
+        <p:spPr>
+          <a:xfrm>
+            <a:off x="6130313" y="6172064"/>
+            <a:ext cx="301558" cy="301558"/>
+          </a:xfrm>
+          <a:prstGeom prst="ellipse">
+            <a:avLst/>
+          </a:prstGeom>
+          <a:solidFill>
+            <a:schemeClr val="bg1"/>
+          </a:solidFill>
+        </p:spPr>
+        <p:style>
+          <a:lnRef idx="2">
+            <a:schemeClr val="accent1">
+              <a:shade val="15000"/>
+            </a:schemeClr>
+          </a:lnRef>
+          <a:fillRef idx="1">
+            <a:schemeClr val="accent1"/>
+          </a:fillRef>
+          <a:effectRef idx="0">
+            <a:schemeClr val="accent1"/>
+          </a:effectRef>
+          <a:fontRef idx="minor">
+            <a:schemeClr val="lt1"/>
+          </a:fontRef>
+        </p:style>
+        <p:txBody>
+          <a:bodyPr rtlCol="0" anchor="ctr"/>
+          <a:lstStyle/>
+          <a:p>
+            <a:pPr algn="ctr"/>
+            <a:endParaRPr lang="nl-NL">
+              <a:solidFill>
+                <a:schemeClr val="bg1"/>
+              </a:solidFill>
+            </a:endParaRPr>
+          </a:p>
+        </p:txBody>
+      </p:sp>
+      <p:sp>
+        <p:nvSpPr>
+          <p:cNvPr id="41" name="Ovaal 40">
+            <a:extLst>
+              <a:ext uri="{FF2B5EF4-FFF2-40B4-BE49-F238E27FC236}">
+                <a16:creationId xmlns:a16="http://schemas.microsoft.com/office/drawing/2014/main" id="{4B36DBA4-1BBF-017F-514A-B85DCA0F9915}"/>
+              </a:ext>
+            </a:extLst>
+          </p:cNvPr>
+          <p:cNvSpPr/>
+          <p:nvPr/>
+        </p:nvSpPr>
+        <p:spPr>
+          <a:xfrm>
+            <a:off x="6846653" y="5500288"/>
+            <a:ext cx="301558" cy="301558"/>
+          </a:xfrm>
+          <a:prstGeom prst="ellipse">
+            <a:avLst/>
+          </a:prstGeom>
+          <a:solidFill>
+            <a:schemeClr val="bg1"/>
+          </a:solidFill>
+        </p:spPr>
+        <p:style>
+          <a:lnRef idx="2">
+            <a:schemeClr val="accent1">
+              <a:shade val="15000"/>
+            </a:schemeClr>
+          </a:lnRef>
+          <a:fillRef idx="1">
+            <a:schemeClr val="accent1"/>
+          </a:fillRef>
+          <a:effectRef idx="0">
+            <a:schemeClr val="accent1"/>
+          </a:effectRef>
+          <a:fontRef idx="minor">
+            <a:schemeClr val="lt1"/>
+          </a:fontRef>
+        </p:style>
+        <p:txBody>
+          <a:bodyPr rtlCol="0" anchor="ctr"/>
+          <a:lstStyle/>
+          <a:p>
+            <a:pPr algn="ctr"/>
+            <a:endParaRPr lang="nl-NL">
+              <a:solidFill>
+                <a:schemeClr val="bg1"/>
+              </a:solidFill>
+            </a:endParaRPr>
+          </a:p>
+        </p:txBody>
+      </p:sp>
+      <p:sp>
+        <p:nvSpPr>
+          <p:cNvPr id="7" name="Ovaal 6">
+            <a:extLst>
+              <a:ext uri="{FF2B5EF4-FFF2-40B4-BE49-F238E27FC236}">
+                <a16:creationId xmlns:a16="http://schemas.microsoft.com/office/drawing/2014/main" id="{54045392-D1AB-6FF8-1AE6-F9E660C7AB73}"/>
+              </a:ext>
+            </a:extLst>
+          </p:cNvPr>
+          <p:cNvSpPr/>
+          <p:nvPr/>
+        </p:nvSpPr>
+        <p:spPr>
+          <a:xfrm>
+            <a:off x="68094" y="2509896"/>
+            <a:ext cx="301558" cy="301558"/>
+          </a:xfrm>
+          <a:prstGeom prst="ellipse">
+            <a:avLst/>
+          </a:prstGeom>
+          <a:solidFill>
+            <a:schemeClr val="bg1"/>
+          </a:solidFill>
+        </p:spPr>
+        <p:style>
+          <a:lnRef idx="2">
+            <a:schemeClr val="accent1">
+              <a:shade val="15000"/>
+            </a:schemeClr>
+          </a:lnRef>
+          <a:fillRef idx="1">
+            <a:schemeClr val="accent1"/>
+          </a:fillRef>
+          <a:effectRef idx="0">
+            <a:schemeClr val="accent1"/>
+          </a:effectRef>
+          <a:fontRef idx="minor">
+            <a:schemeClr val="lt1"/>
+          </a:fontRef>
+        </p:style>
+        <p:txBody>
+          <a:bodyPr rtlCol="0" anchor="ctr"/>
+          <a:lstStyle/>
+          <a:p>
+            <a:pPr algn="ctr"/>
+            <a:endParaRPr lang="nl-NL">
+              <a:solidFill>
+                <a:schemeClr val="bg1"/>
+              </a:solidFill>
+            </a:endParaRPr>
+          </a:p>
+        </p:txBody>
+      </p:sp>
+      <p:sp>
+        <p:nvSpPr>
+          <p:cNvPr id="8" name="Ovaal 7">
+            <a:extLst>
+              <a:ext uri="{FF2B5EF4-FFF2-40B4-BE49-F238E27FC236}">
+                <a16:creationId xmlns:a16="http://schemas.microsoft.com/office/drawing/2014/main" id="{25F1B197-D1A1-A2E5-D0EE-A8E393245DD9}"/>
+              </a:ext>
+            </a:extLst>
+          </p:cNvPr>
+          <p:cNvSpPr/>
+          <p:nvPr/>
+        </p:nvSpPr>
+        <p:spPr>
+          <a:xfrm>
+            <a:off x="1037617" y="3357969"/>
+            <a:ext cx="301558" cy="301558"/>
+          </a:xfrm>
+          <a:prstGeom prst="ellipse">
+            <a:avLst/>
+          </a:prstGeom>
+          <a:solidFill>
+            <a:schemeClr val="bg1"/>
+          </a:solidFill>
+        </p:spPr>
+        <p:style>
+          <a:lnRef idx="2">
+            <a:schemeClr val="accent1">
+              <a:shade val="15000"/>
+            </a:schemeClr>
+          </a:lnRef>
+          <a:fillRef idx="1">
+            <a:schemeClr val="accent1"/>
+          </a:fillRef>
+          <a:effectRef idx="0">
+            <a:schemeClr val="accent1"/>
+          </a:effectRef>
+          <a:fontRef idx="minor">
+            <a:schemeClr val="lt1"/>
+          </a:fontRef>
+        </p:style>
+        <p:txBody>
+          <a:bodyPr rtlCol="0" anchor="ctr"/>
+          <a:lstStyle/>
+          <a:p>
+            <a:pPr algn="ctr"/>
+            <a:endParaRPr lang="nl-NL">
+              <a:solidFill>
+                <a:schemeClr val="bg1"/>
+              </a:solidFill>
+            </a:endParaRPr>
+          </a:p>
+        </p:txBody>
+      </p:sp>
+      <p:sp>
+        <p:nvSpPr>
+          <p:cNvPr id="84" name="Ovaal 83">
+            <a:extLst>
+              <a:ext uri="{FF2B5EF4-FFF2-40B4-BE49-F238E27FC236}">
+                <a16:creationId xmlns:a16="http://schemas.microsoft.com/office/drawing/2014/main" id="{988F97C6-5957-5A89-9C3A-B39A920F0919}"/>
+              </a:ext>
+            </a:extLst>
+          </p:cNvPr>
+          <p:cNvSpPr/>
+          <p:nvPr/>
+        </p:nvSpPr>
+        <p:spPr>
+          <a:xfrm>
+            <a:off x="11274930" y="3333295"/>
+            <a:ext cx="301558" cy="301558"/>
+          </a:xfrm>
+          <a:prstGeom prst="ellipse">
+            <a:avLst/>
+          </a:prstGeom>
+          <a:solidFill>
+            <a:schemeClr val="bg1"/>
+          </a:solidFill>
+        </p:spPr>
+        <p:style>
+          <a:lnRef idx="2">
+            <a:schemeClr val="accent1">
+              <a:shade val="15000"/>
+            </a:schemeClr>
+          </a:lnRef>
+          <a:fillRef idx="1">
+            <a:schemeClr val="accent1"/>
+          </a:fillRef>
+          <a:effectRef idx="0">
+            <a:schemeClr val="accent1"/>
+          </a:effectRef>
+          <a:fontRef idx="minor">
+            <a:schemeClr val="lt1"/>
+          </a:fontRef>
+        </p:style>
+        <p:txBody>
+          <a:bodyPr rtlCol="0" anchor="ctr"/>
+          <a:lstStyle/>
+          <a:p>
+            <a:pPr algn="ctr"/>
+            <a:endParaRPr lang="nl-NL">
+              <a:solidFill>
+                <a:schemeClr val="bg1"/>
+              </a:solidFill>
+            </a:endParaRPr>
           </a:p>
         </p:txBody>
       </p:sp>
     </p:spTree>
     <p:extLst>
       <p:ext uri="{BB962C8B-B14F-4D97-AF65-F5344CB8AC3E}">
-        <p14:creationId xmlns:p14="http://schemas.microsoft.com/office/powerpoint/2010/main" val="1635346009"/>
+        <p14:creationId xmlns:p14="http://schemas.microsoft.com/office/powerpoint/2010/main" val="1432869680"/>
       </p:ext>
     </p:extLst>
   </p:cSld>

--- a/M2/Skill/6-Giflow/6 Gitflow.pptx
+++ b/M2/Skill/6-Giflow/6 Gitflow.pptx
@@ -13,8 +13,6 @@
     <p:sldId id="261" r:id="rId7"/>
     <p:sldId id="262" r:id="rId8"/>
     <p:sldId id="263" r:id="rId9"/>
-    <p:sldId id="266" r:id="rId10"/>
-    <p:sldId id="267" r:id="rId11"/>
   </p:sldIdLst>
   <p:sldSz cx="12192000" cy="6858000"/>
   <p:notesSz cx="6858000" cy="9144000"/>
@@ -268,7 +266,7 @@
           <a:p>
             <a:fld id="{545DE63F-B6A1-4286-98E5-30D0A12D3C8D}" type="datetimeFigureOut">
               <a:rPr lang="nl-NL" smtClean="0"/>
-              <a:t>14-01-2025</a:t>
+              <a:t>2-1-2026</a:t>
             </a:fld>
             <a:endParaRPr lang="nl-NL"/>
           </a:p>
@@ -322,7 +320,7 @@
           <a:p>
             <a:fld id="{D108F25D-CB0B-4DCB-B2CB-040B5AFE7CE3}" type="slidenum">
               <a:rPr lang="nl-NL" smtClean="0"/>
-              <a:t>‹#›</a:t>
+              <a:t>‹nr.›</a:t>
             </a:fld>
             <a:endParaRPr lang="nl-NL"/>
           </a:p>
@@ -466,7 +464,7 @@
           <a:p>
             <a:fld id="{545DE63F-B6A1-4286-98E5-30D0A12D3C8D}" type="datetimeFigureOut">
               <a:rPr lang="nl-NL" smtClean="0"/>
-              <a:t>14-01-2025</a:t>
+              <a:t>2-1-2026</a:t>
             </a:fld>
             <a:endParaRPr lang="nl-NL"/>
           </a:p>
@@ -520,7 +518,7 @@
           <a:p>
             <a:fld id="{D108F25D-CB0B-4DCB-B2CB-040B5AFE7CE3}" type="slidenum">
               <a:rPr lang="nl-NL" smtClean="0"/>
-              <a:t>‹#›</a:t>
+              <a:t>‹nr.›</a:t>
             </a:fld>
             <a:endParaRPr lang="nl-NL"/>
           </a:p>
@@ -674,7 +672,7 @@
           <a:p>
             <a:fld id="{545DE63F-B6A1-4286-98E5-30D0A12D3C8D}" type="datetimeFigureOut">
               <a:rPr lang="nl-NL" smtClean="0"/>
-              <a:t>14-01-2025</a:t>
+              <a:t>2-1-2026</a:t>
             </a:fld>
             <a:endParaRPr lang="nl-NL"/>
           </a:p>
@@ -728,7 +726,7 @@
           <a:p>
             <a:fld id="{D108F25D-CB0B-4DCB-B2CB-040B5AFE7CE3}" type="slidenum">
               <a:rPr lang="nl-NL" smtClean="0"/>
-              <a:t>‹#›</a:t>
+              <a:t>‹nr.›</a:t>
             </a:fld>
             <a:endParaRPr lang="nl-NL"/>
           </a:p>
@@ -872,7 +870,7 @@
           <a:p>
             <a:fld id="{545DE63F-B6A1-4286-98E5-30D0A12D3C8D}" type="datetimeFigureOut">
               <a:rPr lang="nl-NL" smtClean="0"/>
-              <a:t>14-01-2025</a:t>
+              <a:t>2-1-2026</a:t>
             </a:fld>
             <a:endParaRPr lang="nl-NL"/>
           </a:p>
@@ -926,7 +924,7 @@
           <a:p>
             <a:fld id="{D108F25D-CB0B-4DCB-B2CB-040B5AFE7CE3}" type="slidenum">
               <a:rPr lang="nl-NL" smtClean="0"/>
-              <a:t>‹#›</a:t>
+              <a:t>‹nr.›</a:t>
             </a:fld>
             <a:endParaRPr lang="nl-NL"/>
           </a:p>
@@ -1147,7 +1145,7 @@
           <a:p>
             <a:fld id="{545DE63F-B6A1-4286-98E5-30D0A12D3C8D}" type="datetimeFigureOut">
               <a:rPr lang="nl-NL" smtClean="0"/>
-              <a:t>14-01-2025</a:t>
+              <a:t>2-1-2026</a:t>
             </a:fld>
             <a:endParaRPr lang="nl-NL"/>
           </a:p>
@@ -1201,7 +1199,7 @@
           <a:p>
             <a:fld id="{D108F25D-CB0B-4DCB-B2CB-040B5AFE7CE3}" type="slidenum">
               <a:rPr lang="nl-NL" smtClean="0"/>
-              <a:t>‹#›</a:t>
+              <a:t>‹nr.›</a:t>
             </a:fld>
             <a:endParaRPr lang="nl-NL"/>
           </a:p>
@@ -1412,7 +1410,7 @@
           <a:p>
             <a:fld id="{545DE63F-B6A1-4286-98E5-30D0A12D3C8D}" type="datetimeFigureOut">
               <a:rPr lang="nl-NL" smtClean="0"/>
-              <a:t>14-01-2025</a:t>
+              <a:t>2-1-2026</a:t>
             </a:fld>
             <a:endParaRPr lang="nl-NL"/>
           </a:p>
@@ -1466,7 +1464,7 @@
           <a:p>
             <a:fld id="{D108F25D-CB0B-4DCB-B2CB-040B5AFE7CE3}" type="slidenum">
               <a:rPr lang="nl-NL" smtClean="0"/>
-              <a:t>‹#›</a:t>
+              <a:t>‹nr.›</a:t>
             </a:fld>
             <a:endParaRPr lang="nl-NL"/>
           </a:p>
@@ -1824,7 +1822,7 @@
           <a:p>
             <a:fld id="{545DE63F-B6A1-4286-98E5-30D0A12D3C8D}" type="datetimeFigureOut">
               <a:rPr lang="nl-NL" smtClean="0"/>
-              <a:t>14-01-2025</a:t>
+              <a:t>2-1-2026</a:t>
             </a:fld>
             <a:endParaRPr lang="nl-NL"/>
           </a:p>
@@ -1878,7 +1876,7 @@
           <a:p>
             <a:fld id="{D108F25D-CB0B-4DCB-B2CB-040B5AFE7CE3}" type="slidenum">
               <a:rPr lang="nl-NL" smtClean="0"/>
-              <a:t>‹#›</a:t>
+              <a:t>‹nr.›</a:t>
             </a:fld>
             <a:endParaRPr lang="nl-NL"/>
           </a:p>
@@ -1965,7 +1963,7 @@
           <a:p>
             <a:fld id="{545DE63F-B6A1-4286-98E5-30D0A12D3C8D}" type="datetimeFigureOut">
               <a:rPr lang="nl-NL" smtClean="0"/>
-              <a:t>14-01-2025</a:t>
+              <a:t>2-1-2026</a:t>
             </a:fld>
             <a:endParaRPr lang="nl-NL"/>
           </a:p>
@@ -2019,7 +2017,7 @@
           <a:p>
             <a:fld id="{D108F25D-CB0B-4DCB-B2CB-040B5AFE7CE3}" type="slidenum">
               <a:rPr lang="nl-NL" smtClean="0"/>
-              <a:t>‹#›</a:t>
+              <a:t>‹nr.›</a:t>
             </a:fld>
             <a:endParaRPr lang="nl-NL"/>
           </a:p>
@@ -2078,7 +2076,7 @@
           <a:p>
             <a:fld id="{545DE63F-B6A1-4286-98E5-30D0A12D3C8D}" type="datetimeFigureOut">
               <a:rPr lang="nl-NL" smtClean="0"/>
-              <a:t>14-01-2025</a:t>
+              <a:t>2-1-2026</a:t>
             </a:fld>
             <a:endParaRPr lang="nl-NL"/>
           </a:p>
@@ -2132,7 +2130,7 @@
           <a:p>
             <a:fld id="{D108F25D-CB0B-4DCB-B2CB-040B5AFE7CE3}" type="slidenum">
               <a:rPr lang="nl-NL" smtClean="0"/>
-              <a:t>‹#›</a:t>
+              <a:t>‹nr.›</a:t>
             </a:fld>
             <a:endParaRPr lang="nl-NL"/>
           </a:p>
@@ -2389,7 +2387,7 @@
           <a:p>
             <a:fld id="{545DE63F-B6A1-4286-98E5-30D0A12D3C8D}" type="datetimeFigureOut">
               <a:rPr lang="nl-NL" smtClean="0"/>
-              <a:t>14-01-2025</a:t>
+              <a:t>2-1-2026</a:t>
             </a:fld>
             <a:endParaRPr lang="nl-NL"/>
           </a:p>
@@ -2443,7 +2441,7 @@
           <a:p>
             <a:fld id="{D108F25D-CB0B-4DCB-B2CB-040B5AFE7CE3}" type="slidenum">
               <a:rPr lang="nl-NL" smtClean="0"/>
-              <a:t>‹#›</a:t>
+              <a:t>‹nr.›</a:t>
             </a:fld>
             <a:endParaRPr lang="nl-NL"/>
           </a:p>
@@ -2677,7 +2675,7 @@
           <a:p>
             <a:fld id="{545DE63F-B6A1-4286-98E5-30D0A12D3C8D}" type="datetimeFigureOut">
               <a:rPr lang="nl-NL" smtClean="0"/>
-              <a:t>14-01-2025</a:t>
+              <a:t>2-1-2026</a:t>
             </a:fld>
             <a:endParaRPr lang="nl-NL"/>
           </a:p>
@@ -2731,7 +2729,7 @@
           <a:p>
             <a:fld id="{D108F25D-CB0B-4DCB-B2CB-040B5AFE7CE3}" type="slidenum">
               <a:rPr lang="nl-NL" smtClean="0"/>
-              <a:t>‹#›</a:t>
+              <a:t>‹nr.›</a:t>
             </a:fld>
             <a:endParaRPr lang="nl-NL"/>
           </a:p>
@@ -2918,7 +2916,7 @@
           <a:p>
             <a:fld id="{545DE63F-B6A1-4286-98E5-30D0A12D3C8D}" type="datetimeFigureOut">
               <a:rPr lang="nl-NL" smtClean="0"/>
-              <a:t>14-01-2025</a:t>
+              <a:t>2-1-2026</a:t>
             </a:fld>
             <a:endParaRPr lang="nl-NL"/>
           </a:p>
@@ -3008,7 +3006,7 @@
           <a:p>
             <a:fld id="{D108F25D-CB0B-4DCB-B2CB-040B5AFE7CE3}" type="slidenum">
               <a:rPr lang="nl-NL" smtClean="0"/>
-              <a:t>‹#›</a:t>
+              <a:t>‹nr.›</a:t>
             </a:fld>
             <a:endParaRPr lang="nl-NL"/>
           </a:p>
@@ -3410,268 +3408,6 @@
 </p:sld>
 </file>
 
-<file path=ppt/slides/slide10.xml><?xml version="1.0" encoding="utf-8"?>
-<p:sld xmlns:a="http://schemas.openxmlformats.org/drawingml/2006/main" xmlns:r="http://schemas.openxmlformats.org/officeDocument/2006/relationships" xmlns:p="http://schemas.openxmlformats.org/presentationml/2006/main">
-  <p:cSld>
-    <p:spTree>
-      <p:nvGrpSpPr>
-        <p:cNvPr id="1" name="">
-          <a:extLst>
-            <a:ext uri="{FF2B5EF4-FFF2-40B4-BE49-F238E27FC236}">
-              <a16:creationId xmlns:a16="http://schemas.microsoft.com/office/drawing/2014/main" id="{7B216F61-435A-F578-6CFA-FDB6203DD512}"/>
-            </a:ext>
-          </a:extLst>
-        </p:cNvPr>
-        <p:cNvGrpSpPr/>
-        <p:nvPr/>
-      </p:nvGrpSpPr>
-      <p:grpSpPr>
-        <a:xfrm>
-          <a:off x="0" y="0"/>
-          <a:ext cx="0" cy="0"/>
-          <a:chOff x="0" y="0"/>
-          <a:chExt cx="0" cy="0"/>
-        </a:xfrm>
-      </p:grpSpPr>
-      <p:sp>
-        <p:nvSpPr>
-          <p:cNvPr id="2" name="Titel 1">
-            <a:extLst>
-              <a:ext uri="{FF2B5EF4-FFF2-40B4-BE49-F238E27FC236}">
-                <a16:creationId xmlns:a16="http://schemas.microsoft.com/office/drawing/2014/main" id="{3DF45AB8-4FED-7897-B3A6-D36955C43331}"/>
-              </a:ext>
-            </a:extLst>
-          </p:cNvPr>
-          <p:cNvSpPr>
-            <a:spLocks noGrp="1"/>
-          </p:cNvSpPr>
-          <p:nvPr>
-            <p:ph type="title"/>
-          </p:nvPr>
-        </p:nvSpPr>
-        <p:spPr/>
-        <p:txBody>
-          <a:bodyPr/>
-          <a:lstStyle/>
-          <a:p>
-            <a:r>
-              <a:rPr lang="en-US" dirty="0" err="1"/>
-              <a:t>Opruimen</a:t>
-            </a:r>
-            <a:r>
-              <a:rPr lang="en-US" dirty="0"/>
-              <a:t> </a:t>
-            </a:r>
-            <a:r>
-              <a:rPr lang="en-US" dirty="0">
-                <a:solidFill>
-                  <a:srgbClr val="FF0000"/>
-                </a:solidFill>
-              </a:rPr>
-              <a:t>branches</a:t>
-            </a:r>
-            <a:endParaRPr lang="nl-NL" dirty="0"/>
-          </a:p>
-        </p:txBody>
-      </p:sp>
-      <p:sp>
-        <p:nvSpPr>
-          <p:cNvPr id="3" name="Tijdelijke aanduiding voor inhoud 2">
-            <a:extLst>
-              <a:ext uri="{FF2B5EF4-FFF2-40B4-BE49-F238E27FC236}">
-                <a16:creationId xmlns:a16="http://schemas.microsoft.com/office/drawing/2014/main" id="{21BFA882-6CE5-5578-30F3-3C9D57BEA849}"/>
-              </a:ext>
-            </a:extLst>
-          </p:cNvPr>
-          <p:cNvSpPr>
-            <a:spLocks noGrp="1"/>
-          </p:cNvSpPr>
-          <p:nvPr>
-            <p:ph idx="1"/>
-          </p:nvPr>
-        </p:nvSpPr>
-        <p:spPr/>
-        <p:txBody>
-          <a:bodyPr>
-            <a:normAutofit lnSpcReduction="10000"/>
-          </a:bodyPr>
-          <a:lstStyle/>
-          <a:p>
-            <a:r>
-              <a:rPr lang="nl-NL" dirty="0"/>
-              <a:t>Zorg dat je lokale feature </a:t>
-            </a:r>
-            <a:r>
-              <a:rPr lang="nl-NL" dirty="0" err="1"/>
-              <a:t>branch</a:t>
-            </a:r>
-            <a:r>
-              <a:rPr lang="nl-NL" dirty="0"/>
-              <a:t> is verwijderd</a:t>
-            </a:r>
-          </a:p>
-          <a:p>
-            <a:pPr lvl="1"/>
-            <a:r>
-              <a:rPr lang="nl-NL" dirty="0">
-                <a:latin typeface="Courier New" panose="02070309020205020404" pitchFamily="49" charset="0"/>
-                <a:cs typeface="Courier New" panose="02070309020205020404" pitchFamily="49" charset="0"/>
-              </a:rPr>
-              <a:t>git </a:t>
-            </a:r>
-            <a:r>
-              <a:rPr lang="nl-NL" dirty="0" err="1">
-                <a:latin typeface="Courier New" panose="02070309020205020404" pitchFamily="49" charset="0"/>
-                <a:cs typeface="Courier New" panose="02070309020205020404" pitchFamily="49" charset="0"/>
-              </a:rPr>
-              <a:t>branch</a:t>
-            </a:r>
-            <a:r>
-              <a:rPr lang="nl-NL" dirty="0">
-                <a:latin typeface="Courier New" panose="02070309020205020404" pitchFamily="49" charset="0"/>
-                <a:cs typeface="Courier New" panose="02070309020205020404" pitchFamily="49" charset="0"/>
-              </a:rPr>
-              <a:t> -d &lt;</a:t>
-            </a:r>
-            <a:r>
-              <a:rPr lang="nl-NL" dirty="0" err="1">
-                <a:latin typeface="Courier New" panose="02070309020205020404" pitchFamily="49" charset="0"/>
-                <a:cs typeface="Courier New" panose="02070309020205020404" pitchFamily="49" charset="0"/>
-              </a:rPr>
-              <a:t>local-branch</a:t>
-            </a:r>
-            <a:r>
-              <a:rPr lang="nl-NL" dirty="0">
-                <a:latin typeface="Courier New" panose="02070309020205020404" pitchFamily="49" charset="0"/>
-                <a:cs typeface="Courier New" panose="02070309020205020404" pitchFamily="49" charset="0"/>
-              </a:rPr>
-              <a:t>&gt;</a:t>
-            </a:r>
-          </a:p>
-          <a:p>
-            <a:endParaRPr lang="nl-NL" dirty="0"/>
-          </a:p>
-          <a:p>
-            <a:r>
-              <a:rPr lang="nl-NL" dirty="0"/>
-              <a:t>Zorg dat in de online </a:t>
-            </a:r>
-            <a:r>
-              <a:rPr lang="nl-NL" dirty="0" err="1"/>
-              <a:t>repo</a:t>
-            </a:r>
-            <a:r>
-              <a:rPr lang="nl-NL" dirty="0"/>
-              <a:t> geen feature branches meer staan</a:t>
-            </a:r>
-          </a:p>
-          <a:p>
-            <a:pPr lvl="1"/>
-            <a:r>
-              <a:rPr lang="nl-NL" dirty="0">
-                <a:latin typeface="Courier New" panose="02070309020205020404" pitchFamily="49" charset="0"/>
-                <a:cs typeface="Courier New" panose="02070309020205020404" pitchFamily="49" charset="0"/>
-              </a:rPr>
-              <a:t>git push </a:t>
-            </a:r>
-            <a:r>
-              <a:rPr lang="nl-NL" dirty="0" err="1">
-                <a:latin typeface="Courier New" panose="02070309020205020404" pitchFamily="49" charset="0"/>
-                <a:cs typeface="Courier New" panose="02070309020205020404" pitchFamily="49" charset="0"/>
-              </a:rPr>
-              <a:t>origin</a:t>
-            </a:r>
-            <a:r>
-              <a:rPr lang="nl-NL" dirty="0">
-                <a:latin typeface="Courier New" panose="02070309020205020404" pitchFamily="49" charset="0"/>
-                <a:cs typeface="Courier New" panose="02070309020205020404" pitchFamily="49" charset="0"/>
-              </a:rPr>
-              <a:t> --delete &lt;remote-</a:t>
-            </a:r>
-            <a:r>
-              <a:rPr lang="nl-NL" dirty="0" err="1">
-                <a:latin typeface="Courier New" panose="02070309020205020404" pitchFamily="49" charset="0"/>
-                <a:cs typeface="Courier New" panose="02070309020205020404" pitchFamily="49" charset="0"/>
-              </a:rPr>
-              <a:t>branch</a:t>
-            </a:r>
-            <a:r>
-              <a:rPr lang="nl-NL" dirty="0">
-                <a:latin typeface="Courier New" panose="02070309020205020404" pitchFamily="49" charset="0"/>
-                <a:cs typeface="Courier New" panose="02070309020205020404" pitchFamily="49" charset="0"/>
-              </a:rPr>
-              <a:t>-name&gt;</a:t>
-            </a:r>
-          </a:p>
-          <a:p>
-            <a:endParaRPr lang="nl-NL" dirty="0"/>
-          </a:p>
-          <a:p>
-            <a:r>
-              <a:rPr lang="nl-NL" dirty="0"/>
-              <a:t>Controleer dit </a:t>
-            </a:r>
-          </a:p>
-          <a:p>
-            <a:pPr lvl="1"/>
-            <a:r>
-              <a:rPr lang="nl-NL" dirty="0"/>
-              <a:t>Online</a:t>
-            </a:r>
-          </a:p>
-          <a:p>
-            <a:pPr lvl="1"/>
-            <a:r>
-              <a:rPr lang="nl-NL" dirty="0"/>
-              <a:t>Lokaal</a:t>
-            </a:r>
-          </a:p>
-          <a:p>
-            <a:pPr lvl="2"/>
-            <a:r>
-              <a:rPr lang="nl-NL" dirty="0">
-                <a:latin typeface="Courier New" panose="02070309020205020404" pitchFamily="49" charset="0"/>
-                <a:cs typeface="Courier New" panose="02070309020205020404" pitchFamily="49" charset="0"/>
-              </a:rPr>
-              <a:t>git </a:t>
-            </a:r>
-            <a:r>
-              <a:rPr lang="nl-NL" dirty="0" err="1">
-                <a:latin typeface="Courier New" panose="02070309020205020404" pitchFamily="49" charset="0"/>
-                <a:cs typeface="Courier New" panose="02070309020205020404" pitchFamily="49" charset="0"/>
-              </a:rPr>
-              <a:t>branch</a:t>
-            </a:r>
-            <a:r>
-              <a:rPr lang="nl-NL" dirty="0">
-                <a:latin typeface="Courier New" panose="02070309020205020404" pitchFamily="49" charset="0"/>
-                <a:cs typeface="Courier New" panose="02070309020205020404" pitchFamily="49" charset="0"/>
-              </a:rPr>
-              <a:t> -l</a:t>
-            </a:r>
-          </a:p>
-          <a:p>
-            <a:pPr lvl="1"/>
-            <a:endParaRPr lang="nl-NL" dirty="0">
-              <a:latin typeface="Courier New" panose="02070309020205020404" pitchFamily="49" charset="0"/>
-              <a:cs typeface="Courier New" panose="02070309020205020404" pitchFamily="49" charset="0"/>
-            </a:endParaRPr>
-          </a:p>
-        </p:txBody>
-      </p:sp>
-    </p:spTree>
-    <p:extLst>
-      <p:ext uri="{BB962C8B-B14F-4D97-AF65-F5344CB8AC3E}">
-        <p14:creationId xmlns:p14="http://schemas.microsoft.com/office/powerpoint/2010/main" val="2980586130"/>
-      </p:ext>
-    </p:extLst>
-  </p:cSld>
-  <p:clrMapOvr>
-    <a:masterClrMapping/>
-  </p:clrMapOvr>
-</p:sld>
-</file>
-
 <file path=ppt/slides/slide2.xml><?xml version="1.0" encoding="utf-8"?>
 <p:sld xmlns:a="http://schemas.openxmlformats.org/drawingml/2006/main" xmlns:r="http://schemas.openxmlformats.org/officeDocument/2006/relationships" xmlns:p="http://schemas.openxmlformats.org/presentationml/2006/main">
   <p:cSld>
@@ -3872,7 +3608,13 @@
           <a:p>
             <a:r>
               <a:rPr lang="en-US" dirty="0"/>
-              <a:t>Feature Branch</a:t>
+              <a:t>Feature Branches</a:t>
+            </a:r>
+          </a:p>
+          <a:p>
+            <a:r>
+              <a:rPr lang="en-US"/>
+              <a:t>Hotfix</a:t>
             </a:r>
             <a:endParaRPr lang="nl-NL" dirty="0"/>
           </a:p>
@@ -4521,104 +4263,6 @@
     <p:extLst>
       <p:ext uri="{BB962C8B-B14F-4D97-AF65-F5344CB8AC3E}">
         <p14:creationId xmlns:p14="http://schemas.microsoft.com/office/powerpoint/2010/main" val="1635346009"/>
-      </p:ext>
-    </p:extLst>
-  </p:cSld>
-  <p:clrMapOvr>
-    <a:masterClrMapping/>
-  </p:clrMapOvr>
-</p:sld>
-</file>
-
-<file path=ppt/slides/slide9.xml><?xml version="1.0" encoding="utf-8"?>
-<p:sld xmlns:a="http://schemas.openxmlformats.org/drawingml/2006/main" xmlns:r="http://schemas.openxmlformats.org/officeDocument/2006/relationships" xmlns:p="http://schemas.openxmlformats.org/presentationml/2006/main">
-  <p:cSld>
-    <p:spTree>
-      <p:nvGrpSpPr>
-        <p:cNvPr id="1" name=""/>
-        <p:cNvGrpSpPr/>
-        <p:nvPr/>
-      </p:nvGrpSpPr>
-      <p:grpSpPr>
-        <a:xfrm>
-          <a:off x="0" y="0"/>
-          <a:ext cx="0" cy="0"/>
-          <a:chOff x="0" y="0"/>
-          <a:chExt cx="0" cy="0"/>
-        </a:xfrm>
-      </p:grpSpPr>
-      <p:sp>
-        <p:nvSpPr>
-          <p:cNvPr id="2" name="Titel 1">
-            <a:extLst>
-              <a:ext uri="{FF2B5EF4-FFF2-40B4-BE49-F238E27FC236}">
-                <a16:creationId xmlns:a16="http://schemas.microsoft.com/office/drawing/2014/main" id="{0A6044B4-51E0-126A-7050-6A453AE14730}"/>
-              </a:ext>
-            </a:extLst>
-          </p:cNvPr>
-          <p:cNvSpPr>
-            <a:spLocks noGrp="1"/>
-          </p:cNvSpPr>
-          <p:nvPr>
-            <p:ph type="title"/>
-          </p:nvPr>
-        </p:nvSpPr>
-        <p:spPr/>
-        <p:txBody>
-          <a:bodyPr/>
-          <a:lstStyle/>
-          <a:p>
-            <a:r>
-              <a:rPr lang="en-US" dirty="0" err="1"/>
-              <a:t>Opdracht</a:t>
-            </a:r>
-            <a:r>
-              <a:rPr lang="en-US" dirty="0"/>
-              <a:t> </a:t>
-            </a:r>
-            <a:r>
-              <a:rPr lang="en-US" dirty="0" err="1"/>
-              <a:t>Gitflow</a:t>
-            </a:r>
-            <a:endParaRPr lang="nl-NL" dirty="0"/>
-          </a:p>
-        </p:txBody>
-      </p:sp>
-      <p:sp>
-        <p:nvSpPr>
-          <p:cNvPr id="3" name="Tijdelijke aanduiding voor tekst 2">
-            <a:extLst>
-              <a:ext uri="{FF2B5EF4-FFF2-40B4-BE49-F238E27FC236}">
-                <a16:creationId xmlns:a16="http://schemas.microsoft.com/office/drawing/2014/main" id="{7E1202B8-7B7E-5BCC-31B1-E466D1B76D36}"/>
-              </a:ext>
-            </a:extLst>
-          </p:cNvPr>
-          <p:cNvSpPr>
-            <a:spLocks noGrp="1"/>
-          </p:cNvSpPr>
-          <p:nvPr>
-            <p:ph type="body" idx="1"/>
-          </p:nvPr>
-        </p:nvSpPr>
-        <p:spPr/>
-        <p:txBody>
-          <a:bodyPr/>
-          <a:lstStyle/>
-          <a:p>
-            <a:r>
-              <a:rPr lang="nl-NL" dirty="0">
-                <a:hlinkClick r:id="rId2"/>
-              </a:rPr>
-              <a:t>Click hier voor de opdracht</a:t>
-            </a:r>
-            <a:endParaRPr lang="nl-NL" dirty="0"/>
-          </a:p>
-        </p:txBody>
-      </p:sp>
-    </p:spTree>
-    <p:extLst>
-      <p:ext uri="{BB962C8B-B14F-4D97-AF65-F5344CB8AC3E}">
-        <p14:creationId xmlns:p14="http://schemas.microsoft.com/office/powerpoint/2010/main" val="3826218826"/>
       </p:ext>
     </p:extLst>
   </p:cSld>
